--- a/slides/ch01-communicating-in-todays-workplace.pptx
+++ b/slides/ch01-communicating-in-todays-workplace.pptx
@@ -2567,7 +2567,7 @@
           <a:lstStyle/>
           <a:p>
             <a:r>
-              <a:t>Standard closing slide pattern used across all chapter decks: practice, graded work, writing, reflection, preview.</a:t>
+              <a:t>Delivery-neutral closing slide (no 'next class' phrasing — works for asynchronous sections). Standard pattern across all chapter decks: practice, graded work, writing, reflection, preview.</a:t>
             </a:r>
           </a:p>
         </p:txBody>
@@ -17659,7 +17659,7 @@
       <p:grpSpPr/>
       <p:sp>
         <p:nvSpPr>
-          <p:cNvPr id="2" name="TextBox 1" descr="Slide title: Before next class"/>
+          <p:cNvPr id="2" name="TextBox 1" descr="Slide title: Your next steps"/>
           <p:cNvSpPr txBox="1"/>
           <p:nvPr/>
         </p:nvSpPr>
@@ -17686,7 +17686,7 @@
                 </a:solidFill>
                 <a:latin typeface="Cambria"/>
               </a:rPr>
-              <a:t>Before next class</a:t>
+              <a:t>Your next steps</a:t>
             </a:r>
           </a:p>
         </p:txBody>
@@ -17846,7 +17846,7 @@
                 </a:solidFill>
                 <a:latin typeface="Calibri"/>
               </a:rPr>
-              <a:t>Complete the Chapter 1 homework on the site; paste your completion code into the LMS assignment.</a:t>
+              <a:t>Complete the Chapter 1 homework on the site; paste your completion code into the Blackboard assignment before the weekly deadline.</a:t>
             </a:r>
           </a:p>
           <a:p>

--- a/slides/ch01-communicating-in-todays-workplace.pptx
+++ b/slides/ch01-communicating-in-todays-workplace.pptx
@@ -6003,7 +6003,40 @@
       <p:grpSpPr/>
       <p:sp>
         <p:nvSpPr>
-          <p:cNvPr id="2" name="TextBox 1" descr="Course label"/>
+          <p:cNvPr id="2" name="Title 1" descr="Slide title: Communicating in Today's Workplace"/>
+          <p:cNvSpPr>
+            <a:spLocks noGrp="1"/>
+          </p:cNvSpPr>
+          <p:nvPr>
+            <p:ph type="title"/>
+          </p:nvPr>
+        </p:nvSpPr>
+        <p:spPr>
+          <a:xfrm>
+            <a:off x="822960" y="1920240"/>
+            <a:ext cx="10515600" cy="1737360"/>
+          </a:xfrm>
+        </p:spPr>
+        <p:txBody>
+          <a:bodyPr wrap="square"/>
+          <a:lstStyle/>
+          <a:p>
+            <a:pPr algn="l"/>
+            <a:r>
+              <a:rPr sz="4800" b="1">
+                <a:solidFill>
+                  <a:srgbClr val="FFFFFF"/>
+                </a:solidFill>
+                <a:latin typeface="Cambria"/>
+              </a:rPr>
+              <a:t>Communicating in Today's Workplace</a:t>
+            </a:r>
+          </a:p>
+        </p:txBody>
+      </p:sp>
+      <p:sp>
+        <p:nvSpPr>
+          <p:cNvPr id="3" name="TextBox 2" descr="Course label"/>
           <p:cNvSpPr txBox="1"/>
           <p:nvPr/>
         </p:nvSpPr>
@@ -6036,40 +6069,6 @@
                 <a:latin typeface="Calibri"/>
               </a:rPr>
               <a:t>BADM 225 · PROFESSIONAL COMMUNICATION FOR BUSINESS</a:t>
-            </a:r>
-          </a:p>
-        </p:txBody>
-      </p:sp>
-      <p:sp>
-        <p:nvSpPr>
-          <p:cNvPr id="3" name="TextBox 2" descr="Slide title: Communicating in Today's Workplace"/>
-          <p:cNvSpPr txBox="1"/>
-          <p:nvPr/>
-        </p:nvSpPr>
-        <p:spPr>
-          <a:xfrm>
-            <a:off x="822960" y="1920240"/>
-            <a:ext cx="10515600" cy="1737360"/>
-          </a:xfrm>
-          <a:prstGeom prst="rect">
-            <a:avLst/>
-          </a:prstGeom>
-          <a:noFill/>
-        </p:spPr>
-        <p:txBody>
-          <a:bodyPr wrap="square">
-            <a:spAutoFit/>
-          </a:bodyPr>
-          <a:lstStyle/>
-          <a:p>
-            <a:r>
-              <a:rPr sz="4800" b="1">
-                <a:solidFill>
-                  <a:srgbClr val="FFFFFF"/>
-                </a:solidFill>
-                <a:latin typeface="Cambria"/>
-              </a:rPr>
-              <a:t>Communicating in Today's Workplace</a:t>
             </a:r>
           </a:p>
         </p:txBody>
@@ -6180,26 +6179,25 @@
       <p:grpSpPr/>
       <p:sp>
         <p:nvSpPr>
-          <p:cNvPr id="2" name="TextBox 1" descr="Slide title: The richness continuum"/>
-          <p:cNvSpPr txBox="1"/>
-          <p:nvPr/>
+          <p:cNvPr id="2" name="Title 1" descr="Slide title: The richness continuum"/>
+          <p:cNvSpPr>
+            <a:spLocks noGrp="1"/>
+          </p:cNvSpPr>
+          <p:nvPr>
+            <p:ph type="title"/>
+          </p:nvPr>
         </p:nvSpPr>
         <p:spPr>
           <a:xfrm>
             <a:off x="502920" y="411480"/>
             <a:ext cx="11155680" cy="914400"/>
           </a:xfrm>
-          <a:prstGeom prst="rect">
-            <a:avLst/>
-          </a:prstGeom>
-          <a:noFill/>
-        </p:spPr>
-        <p:txBody>
-          <a:bodyPr wrap="square">
-            <a:spAutoFit/>
-          </a:bodyPr>
-          <a:lstStyle/>
-          <a:p>
+        </p:spPr>
+        <p:txBody>
+          <a:bodyPr wrap="square"/>
+          <a:lstStyle/>
+          <a:p>
+            <a:pPr algn="l"/>
             <a:r>
               <a:rPr sz="3200" b="1">
                 <a:solidFill>
@@ -6835,26 +6833,25 @@
       <p:grpSpPr/>
       <p:sp>
         <p:nvSpPr>
-          <p:cNvPr id="2" name="TextBox 1" descr="Slide title: Match the channel to the message"/>
-          <p:cNvSpPr txBox="1"/>
-          <p:nvPr/>
+          <p:cNvPr id="2" name="Title 1" descr="Slide title: Match the channel to the message"/>
+          <p:cNvSpPr>
+            <a:spLocks noGrp="1"/>
+          </p:cNvSpPr>
+          <p:nvPr>
+            <p:ph type="title"/>
+          </p:nvPr>
         </p:nvSpPr>
         <p:spPr>
           <a:xfrm>
             <a:off x="502920" y="411480"/>
             <a:ext cx="11155680" cy="914400"/>
           </a:xfrm>
-          <a:prstGeom prst="rect">
-            <a:avLst/>
-          </a:prstGeom>
-          <a:noFill/>
-        </p:spPr>
-        <p:txBody>
-          <a:bodyPr wrap="square">
-            <a:spAutoFit/>
-          </a:bodyPr>
-          <a:lstStyle/>
-          <a:p>
+        </p:spPr>
+        <p:txBody>
+          <a:bodyPr wrap="square"/>
+          <a:lstStyle/>
+          <a:p>
+            <a:pPr algn="l"/>
             <a:r>
               <a:rPr sz="3200" b="1">
                 <a:solidFill>
@@ -7000,7 +6997,7 @@
             <a:r>
               <a:rPr sz="1500">
                 <a:solidFill>
-                  <a:srgbClr val="C9931A"/>
+                  <a:srgbClr val="8A6410"/>
                 </a:solidFill>
                 <a:latin typeface="Calibri"/>
               </a:rPr>
@@ -7025,7 +7022,7 @@
             <a:r>
               <a:rPr sz="1500">
                 <a:solidFill>
-                  <a:srgbClr val="C9931A"/>
+                  <a:srgbClr val="8A6410"/>
                 </a:solidFill>
                 <a:latin typeface="Calibri"/>
               </a:rPr>
@@ -7050,7 +7047,7 @@
             <a:r>
               <a:rPr sz="1500">
                 <a:solidFill>
-                  <a:srgbClr val="C9931A"/>
+                  <a:srgbClr val="8A6410"/>
                 </a:solidFill>
                 <a:latin typeface="Calibri"/>
               </a:rPr>
@@ -7075,7 +7072,7 @@
             <a:r>
               <a:rPr sz="1500">
                 <a:solidFill>
-                  <a:srgbClr val="C9931A"/>
+                  <a:srgbClr val="8A6410"/>
                 </a:solidFill>
                 <a:latin typeface="Calibri"/>
               </a:rPr>
@@ -7157,7 +7154,7 @@
             <a:r>
               <a:rPr sz="1500">
                 <a:solidFill>
-                  <a:srgbClr val="C9931A"/>
+                  <a:srgbClr val="8A6410"/>
                 </a:solidFill>
                 <a:latin typeface="Calibri"/>
               </a:rPr>
@@ -7182,7 +7179,7 @@
             <a:r>
               <a:rPr sz="1500">
                 <a:solidFill>
-                  <a:srgbClr val="C9931A"/>
+                  <a:srgbClr val="8A6410"/>
                 </a:solidFill>
                 <a:latin typeface="Calibri"/>
               </a:rPr>
@@ -7207,7 +7204,7 @@
             <a:r>
               <a:rPr sz="1500">
                 <a:solidFill>
-                  <a:srgbClr val="C9931A"/>
+                  <a:srgbClr val="8A6410"/>
                 </a:solidFill>
                 <a:latin typeface="Calibri"/>
               </a:rPr>
@@ -7232,7 +7229,7 @@
             <a:r>
               <a:rPr sz="1500">
                 <a:solidFill>
-                  <a:srgbClr val="C9931A"/>
+                  <a:srgbClr val="8A6410"/>
                 </a:solidFill>
                 <a:latin typeface="Calibri"/>
               </a:rPr>
@@ -7278,26 +7275,25 @@
       <p:grpSpPr/>
       <p:sp>
         <p:nvSpPr>
-          <p:cNvPr id="2" name="TextBox 1" descr="Slide title: You make the call"/>
-          <p:cNvSpPr txBox="1"/>
-          <p:nvPr/>
+          <p:cNvPr id="2" name="Title 1" descr="Slide title: You make the call"/>
+          <p:cNvSpPr>
+            <a:spLocks noGrp="1"/>
+          </p:cNvSpPr>
+          <p:nvPr>
+            <p:ph type="title"/>
+          </p:nvPr>
         </p:nvSpPr>
         <p:spPr>
           <a:xfrm>
             <a:off x="502920" y="411480"/>
             <a:ext cx="11155680" cy="914400"/>
           </a:xfrm>
-          <a:prstGeom prst="rect">
-            <a:avLst/>
-          </a:prstGeom>
-          <a:noFill/>
-        </p:spPr>
-        <p:txBody>
-          <a:bodyPr wrap="square">
-            <a:spAutoFit/>
-          </a:bodyPr>
-          <a:lstStyle/>
-          <a:p>
+        </p:spPr>
+        <p:txBody>
+          <a:bodyPr wrap="square"/>
+          <a:lstStyle/>
+          <a:p>
+            <a:pPr algn="l"/>
             <a:r>
               <a:rPr sz="3200" b="1">
                 <a:solidFill>
@@ -7878,26 +7874,25 @@
       <p:grpSpPr/>
       <p:sp>
         <p:nvSpPr>
-          <p:cNvPr id="2" name="TextBox 1" descr="Slide title: How information moves inside an organization"/>
-          <p:cNvSpPr txBox="1"/>
-          <p:nvPr/>
+          <p:cNvPr id="2" name="Title 1" descr="Slide title: How information moves inside an organization"/>
+          <p:cNvSpPr>
+            <a:spLocks noGrp="1"/>
+          </p:cNvSpPr>
+          <p:nvPr>
+            <p:ph type="title"/>
+          </p:nvPr>
         </p:nvSpPr>
         <p:spPr>
           <a:xfrm>
             <a:off x="502920" y="411480"/>
             <a:ext cx="11155680" cy="914400"/>
           </a:xfrm>
-          <a:prstGeom prst="rect">
-            <a:avLst/>
-          </a:prstGeom>
-          <a:noFill/>
-        </p:spPr>
-        <p:txBody>
-          <a:bodyPr wrap="square">
-            <a:spAutoFit/>
-          </a:bodyPr>
-          <a:lstStyle/>
-          <a:p>
+        </p:spPr>
+        <p:txBody>
+          <a:bodyPr wrap="square"/>
+          <a:lstStyle/>
+          <a:p>
+            <a:pPr algn="l"/>
             <a:r>
               <a:rPr sz="3200" b="1">
                 <a:solidFill>
@@ -8439,7 +8434,40 @@
       <p:grpSpPr/>
       <p:sp>
         <p:nvSpPr>
-          <p:cNvPr id="2" name="TextBox 1" descr="Section number 03"/>
+          <p:cNvPr id="2" name="Title 1" descr="Slide title: Listening like a professional"/>
+          <p:cNvSpPr>
+            <a:spLocks noGrp="1"/>
+          </p:cNvSpPr>
+          <p:nvPr>
+            <p:ph type="title"/>
+          </p:nvPr>
+        </p:nvSpPr>
+        <p:spPr>
+          <a:xfrm>
+            <a:off x="822960" y="2834640"/>
+            <a:ext cx="10515600" cy="914400"/>
+          </a:xfrm>
+        </p:spPr>
+        <p:txBody>
+          <a:bodyPr wrap="square"/>
+          <a:lstStyle/>
+          <a:p>
+            <a:pPr algn="l"/>
+            <a:r>
+              <a:rPr sz="4000" b="1">
+                <a:solidFill>
+                  <a:srgbClr val="FFFFFF"/>
+                </a:solidFill>
+                <a:latin typeface="Cambria"/>
+              </a:rPr>
+              <a:t>Listening like a professional</a:t>
+            </a:r>
+          </a:p>
+        </p:txBody>
+      </p:sp>
+      <p:sp>
+        <p:nvSpPr>
+          <p:cNvPr id="3" name="TextBox 2" descr="Section number 03"/>
           <p:cNvSpPr txBox="1"/>
           <p:nvPr/>
         </p:nvSpPr>
@@ -8472,40 +8500,6 @@
                 <a:latin typeface="Cambria"/>
               </a:rPr>
               <a:t>03</a:t>
-            </a:r>
-          </a:p>
-        </p:txBody>
-      </p:sp>
-      <p:sp>
-        <p:nvSpPr>
-          <p:cNvPr id="3" name="TextBox 2" descr="Slide title: Listening like a professional"/>
-          <p:cNvSpPr txBox="1"/>
-          <p:nvPr/>
-        </p:nvSpPr>
-        <p:spPr>
-          <a:xfrm>
-            <a:off x="822960" y="2834640"/>
-            <a:ext cx="10515600" cy="914400"/>
-          </a:xfrm>
-          <a:prstGeom prst="rect">
-            <a:avLst/>
-          </a:prstGeom>
-          <a:noFill/>
-        </p:spPr>
-        <p:txBody>
-          <a:bodyPr wrap="square">
-            <a:spAutoFit/>
-          </a:bodyPr>
-          <a:lstStyle/>
-          <a:p>
-            <a:r>
-              <a:rPr sz="4000" b="1">
-                <a:solidFill>
-                  <a:srgbClr val="FFFFFF"/>
-                </a:solidFill>
-                <a:latin typeface="Cambria"/>
-              </a:rPr>
-              <a:t>Listening like a professional</a:t>
             </a:r>
           </a:p>
         </p:txBody>
@@ -8646,14 +8640,116 @@
       <p:grpSpPr/>
       <p:sp>
         <p:nvSpPr>
-          <p:cNvPr id="2" name="TextBox 1" descr="Slide title: Poor listening is expensive"/>
-          <p:cNvSpPr txBox="1"/>
-          <p:nvPr/>
+          <p:cNvPr id="2" name="Title 1" descr="Slide title: Poor listening is expensive"/>
+          <p:cNvSpPr>
+            <a:spLocks noGrp="1"/>
+          </p:cNvSpPr>
+          <p:nvPr>
+            <p:ph type="title"/>
+          </p:nvPr>
         </p:nvSpPr>
         <p:spPr>
           <a:xfrm>
             <a:off x="502920" y="411480"/>
             <a:ext cx="11155680" cy="914400"/>
+          </a:xfrm>
+        </p:spPr>
+        <p:txBody>
+          <a:bodyPr wrap="square"/>
+          <a:lstStyle/>
+          <a:p>
+            <a:pPr algn="l"/>
+            <a:r>
+              <a:rPr sz="3200" b="1">
+                <a:solidFill>
+                  <a:srgbClr val="0E4D33"/>
+                </a:solidFill>
+                <a:latin typeface="Cambria"/>
+              </a:rPr>
+              <a:t>Poor listening is expensive</a:t>
+            </a:r>
+          </a:p>
+        </p:txBody>
+      </p:sp>
+      <p:sp>
+        <p:nvSpPr>
+          <p:cNvPr id="3" name="TextBox 2" descr="Footer: BADM 225 · Chapter 1"/>
+          <p:cNvSpPr txBox="1"/>
+          <p:nvPr/>
+        </p:nvSpPr>
+        <p:spPr>
+          <a:xfrm>
+            <a:off x="502920" y="6446520"/>
+            <a:ext cx="5486400" cy="320040"/>
+          </a:xfrm>
+          <a:prstGeom prst="rect">
+            <a:avLst/>
+          </a:prstGeom>
+          <a:noFill/>
+        </p:spPr>
+        <p:txBody>
+          <a:bodyPr wrap="none">
+            <a:spAutoFit/>
+          </a:bodyPr>
+          <a:lstStyle/>
+          <a:p>
+            <a:r>
+              <a:rPr sz="1000">
+                <a:solidFill>
+                  <a:srgbClr val="5E6B64"/>
+                </a:solidFill>
+                <a:latin typeface="Calibri"/>
+              </a:rPr>
+              <a:t>BADM 225 · Chapter 1</a:t>
+            </a:r>
+          </a:p>
+        </p:txBody>
+      </p:sp>
+      <p:sp>
+        <p:nvSpPr>
+          <p:cNvPr id="4" name="TextBox 3" descr="Slide number 15"/>
+          <p:cNvSpPr txBox="1"/>
+          <p:nvPr/>
+        </p:nvSpPr>
+        <p:spPr>
+          <a:xfrm>
+            <a:off x="11247120" y="6446520"/>
+            <a:ext cx="640080" cy="320040"/>
+          </a:xfrm>
+          <a:prstGeom prst="rect">
+            <a:avLst/>
+          </a:prstGeom>
+          <a:noFill/>
+        </p:spPr>
+        <p:txBody>
+          <a:bodyPr wrap="none">
+            <a:spAutoFit/>
+          </a:bodyPr>
+          <a:lstStyle/>
+          <a:p>
+            <a:pPr algn="r"/>
+            <a:r>
+              <a:rPr sz="1000">
+                <a:solidFill>
+                  <a:srgbClr val="5E6B64"/>
+                </a:solidFill>
+                <a:latin typeface="Calibri"/>
+              </a:rPr>
+              <a:t>15</a:t>
+            </a:r>
+          </a:p>
+        </p:txBody>
+      </p:sp>
+      <p:sp>
+        <p:nvSpPr>
+          <p:cNvPr id="5" name="TextBox 4" descr="Key points"/>
+          <p:cNvSpPr txBox="1"/>
+          <p:nvPr/>
+        </p:nvSpPr>
+        <p:spPr>
+          <a:xfrm>
+            <a:off x="548640" y="1554480"/>
+            <a:ext cx="11064240" cy="4663440"/>
           </a:xfrm>
           <a:prstGeom prst="rect">
             <a:avLst/>
@@ -8666,109 +8762,6 @@
           </a:bodyPr>
           <a:lstStyle/>
           <a:p>
-            <a:r>
-              <a:rPr sz="3200" b="1">
-                <a:solidFill>
-                  <a:srgbClr val="0E4D33"/>
-                </a:solidFill>
-                <a:latin typeface="Cambria"/>
-              </a:rPr>
-              <a:t>Poor listening is expensive</a:t>
-            </a:r>
-          </a:p>
-        </p:txBody>
-      </p:sp>
-      <p:sp>
-        <p:nvSpPr>
-          <p:cNvPr id="3" name="TextBox 2" descr="Footer: BADM 225 · Chapter 1"/>
-          <p:cNvSpPr txBox="1"/>
-          <p:nvPr/>
-        </p:nvSpPr>
-        <p:spPr>
-          <a:xfrm>
-            <a:off x="502920" y="6446520"/>
-            <a:ext cx="5486400" cy="320040"/>
-          </a:xfrm>
-          <a:prstGeom prst="rect">
-            <a:avLst/>
-          </a:prstGeom>
-          <a:noFill/>
-        </p:spPr>
-        <p:txBody>
-          <a:bodyPr wrap="none">
-            <a:spAutoFit/>
-          </a:bodyPr>
-          <a:lstStyle/>
-          <a:p>
-            <a:r>
-              <a:rPr sz="1000">
-                <a:solidFill>
-                  <a:srgbClr val="5E6B64"/>
-                </a:solidFill>
-                <a:latin typeface="Calibri"/>
-              </a:rPr>
-              <a:t>BADM 225 · Chapter 1</a:t>
-            </a:r>
-          </a:p>
-        </p:txBody>
-      </p:sp>
-      <p:sp>
-        <p:nvSpPr>
-          <p:cNvPr id="4" name="TextBox 3" descr="Slide number 15"/>
-          <p:cNvSpPr txBox="1"/>
-          <p:nvPr/>
-        </p:nvSpPr>
-        <p:spPr>
-          <a:xfrm>
-            <a:off x="11247120" y="6446520"/>
-            <a:ext cx="640080" cy="320040"/>
-          </a:xfrm>
-          <a:prstGeom prst="rect">
-            <a:avLst/>
-          </a:prstGeom>
-          <a:noFill/>
-        </p:spPr>
-        <p:txBody>
-          <a:bodyPr wrap="none">
-            <a:spAutoFit/>
-          </a:bodyPr>
-          <a:lstStyle/>
-          <a:p>
-            <a:pPr algn="r"/>
-            <a:r>
-              <a:rPr sz="1000">
-                <a:solidFill>
-                  <a:srgbClr val="5E6B64"/>
-                </a:solidFill>
-                <a:latin typeface="Calibri"/>
-              </a:rPr>
-              <a:t>15</a:t>
-            </a:r>
-          </a:p>
-        </p:txBody>
-      </p:sp>
-      <p:sp>
-        <p:nvSpPr>
-          <p:cNvPr id="5" name="TextBox 4" descr="Key points"/>
-          <p:cNvSpPr txBox="1"/>
-          <p:nvPr/>
-        </p:nvSpPr>
-        <p:spPr>
-          <a:xfrm>
-            <a:off x="548640" y="1554480"/>
-            <a:ext cx="11064240" cy="4663440"/>
-          </a:xfrm>
-          <a:prstGeom prst="rect">
-            <a:avLst/>
-          </a:prstGeom>
-          <a:noFill/>
-        </p:spPr>
-        <p:txBody>
-          <a:bodyPr wrap="square">
-            <a:spAutoFit/>
-          </a:bodyPr>
-          <a:lstStyle/>
-          <a:p>
             <a:pPr algn="l">
               <a:spcAft>
                 <a:spcPts val="1200"/>
@@ -8777,7 +8770,7 @@
             <a:r>
               <a:rPr sz="1700">
                 <a:solidFill>
-                  <a:srgbClr val="C9931A"/>
+                  <a:srgbClr val="8A6410"/>
                 </a:solidFill>
                 <a:latin typeface="Calibri"/>
               </a:rPr>
@@ -8802,7 +8795,7 @@
             <a:r>
               <a:rPr sz="1700">
                 <a:solidFill>
-                  <a:srgbClr val="C9931A"/>
+                  <a:srgbClr val="8A6410"/>
                 </a:solidFill>
                 <a:latin typeface="Calibri"/>
               </a:rPr>
@@ -8827,7 +8820,7 @@
             <a:r>
               <a:rPr sz="1700">
                 <a:solidFill>
-                  <a:srgbClr val="C9931A"/>
+                  <a:srgbClr val="8A6410"/>
                 </a:solidFill>
                 <a:latin typeface="Calibri"/>
               </a:rPr>
@@ -8852,7 +8845,7 @@
             <a:r>
               <a:rPr sz="1700">
                 <a:solidFill>
-                  <a:srgbClr val="C9931A"/>
+                  <a:srgbClr val="8A6410"/>
                 </a:solidFill>
                 <a:latin typeface="Calibri"/>
               </a:rPr>
@@ -8907,26 +8900,25 @@
       <p:grpSpPr/>
       <p:sp>
         <p:nvSpPr>
-          <p:cNvPr id="2" name="TextBox 1" descr="Slide title: What happens between hearing and remembering"/>
-          <p:cNvSpPr txBox="1"/>
-          <p:nvPr/>
+          <p:cNvPr id="2" name="Title 1" descr="Slide title: What happens between hearing and remembering"/>
+          <p:cNvSpPr>
+            <a:spLocks noGrp="1"/>
+          </p:cNvSpPr>
+          <p:nvPr>
+            <p:ph type="title"/>
+          </p:nvPr>
         </p:nvSpPr>
         <p:spPr>
           <a:xfrm>
             <a:off x="502920" y="411480"/>
             <a:ext cx="11155680" cy="914400"/>
           </a:xfrm>
-          <a:prstGeom prst="rect">
-            <a:avLst/>
-          </a:prstGeom>
-          <a:noFill/>
-        </p:spPr>
-        <p:txBody>
-          <a:bodyPr wrap="square">
-            <a:spAutoFit/>
-          </a:bodyPr>
-          <a:lstStyle/>
-          <a:p>
+        </p:spPr>
+        <p:txBody>
+          <a:bodyPr wrap="square"/>
+          <a:lstStyle/>
+          <a:p>
+            <a:pPr algn="l"/>
             <a:r>
               <a:rPr sz="3200" b="1">
                 <a:solidFill>
@@ -9562,26 +9554,25 @@
       <p:grpSpPr/>
       <p:sp>
         <p:nvSpPr>
-          <p:cNvPr id="2" name="TextBox 1" descr="Slide title: What gets in the way"/>
-          <p:cNvSpPr txBox="1"/>
-          <p:nvPr/>
+          <p:cNvPr id="2" name="Title 1" descr="Slide title: What gets in the way"/>
+          <p:cNvSpPr>
+            <a:spLocks noGrp="1"/>
+          </p:cNvSpPr>
+          <p:nvPr>
+            <p:ph type="title"/>
+          </p:nvPr>
         </p:nvSpPr>
         <p:spPr>
           <a:xfrm>
             <a:off x="502920" y="411480"/>
             <a:ext cx="11155680" cy="914400"/>
           </a:xfrm>
-          <a:prstGeom prst="rect">
-            <a:avLst/>
-          </a:prstGeom>
-          <a:noFill/>
-        </p:spPr>
-        <p:txBody>
-          <a:bodyPr wrap="square">
-            <a:spAutoFit/>
-          </a:bodyPr>
-          <a:lstStyle/>
-          <a:p>
+        </p:spPr>
+        <p:txBody>
+          <a:bodyPr wrap="square"/>
+          <a:lstStyle/>
+          <a:p>
+            <a:pPr algn="l"/>
             <a:r>
               <a:rPr sz="3200" b="1">
                 <a:solidFill>
@@ -9727,7 +9718,7 @@
             <a:r>
               <a:rPr sz="1500">
                 <a:solidFill>
-                  <a:srgbClr val="C9931A"/>
+                  <a:srgbClr val="8A6410"/>
                 </a:solidFill>
                 <a:latin typeface="Calibri"/>
               </a:rPr>
@@ -9752,7 +9743,7 @@
             <a:r>
               <a:rPr sz="1500">
                 <a:solidFill>
-                  <a:srgbClr val="C9931A"/>
+                  <a:srgbClr val="8A6410"/>
                 </a:solidFill>
                 <a:latin typeface="Calibri"/>
               </a:rPr>
@@ -9777,7 +9768,7 @@
             <a:r>
               <a:rPr sz="1500">
                 <a:solidFill>
-                  <a:srgbClr val="C9931A"/>
+                  <a:srgbClr val="8A6410"/>
                 </a:solidFill>
                 <a:latin typeface="Calibri"/>
               </a:rPr>
@@ -9859,7 +9850,7 @@
             <a:r>
               <a:rPr sz="1500">
                 <a:solidFill>
-                  <a:srgbClr val="C9931A"/>
+                  <a:srgbClr val="8A6410"/>
                 </a:solidFill>
                 <a:latin typeface="Calibri"/>
               </a:rPr>
@@ -9884,7 +9875,7 @@
             <a:r>
               <a:rPr sz="1500">
                 <a:solidFill>
-                  <a:srgbClr val="C9931A"/>
+                  <a:srgbClr val="8A6410"/>
                 </a:solidFill>
                 <a:latin typeface="Calibri"/>
               </a:rPr>
@@ -9909,7 +9900,7 @@
             <a:r>
               <a:rPr sz="1500">
                 <a:solidFill>
-                  <a:srgbClr val="C9931A"/>
+                  <a:srgbClr val="8A6410"/>
                 </a:solidFill>
                 <a:latin typeface="Calibri"/>
               </a:rPr>
@@ -9934,7 +9925,7 @@
             <a:r>
               <a:rPr sz="1500">
                 <a:solidFill>
-                  <a:srgbClr val="C9931A"/>
+                  <a:srgbClr val="8A6410"/>
                 </a:solidFill>
                 <a:latin typeface="Calibri"/>
               </a:rPr>
@@ -9980,26 +9971,25 @@
       <p:grpSpPr/>
       <p:sp>
         <p:nvSpPr>
-          <p:cNvPr id="2" name="TextBox 1" descr="Slide title: Active listening: the visible techniques"/>
-          <p:cNvSpPr txBox="1"/>
-          <p:nvPr/>
+          <p:cNvPr id="2" name="Title 1" descr="Slide title: Active listening: the visible techniques"/>
+          <p:cNvSpPr>
+            <a:spLocks noGrp="1"/>
+          </p:cNvSpPr>
+          <p:nvPr>
+            <p:ph type="title"/>
+          </p:nvPr>
         </p:nvSpPr>
         <p:spPr>
           <a:xfrm>
             <a:off x="502920" y="411480"/>
             <a:ext cx="11155680" cy="914400"/>
           </a:xfrm>
-          <a:prstGeom prst="rect">
-            <a:avLst/>
-          </a:prstGeom>
-          <a:noFill/>
-        </p:spPr>
-        <p:txBody>
-          <a:bodyPr wrap="square">
-            <a:spAutoFit/>
-          </a:bodyPr>
-          <a:lstStyle/>
-          <a:p>
+        </p:spPr>
+        <p:txBody>
+          <a:bodyPr wrap="square"/>
+          <a:lstStyle/>
+          <a:p>
+            <a:pPr algn="l"/>
             <a:r>
               <a:rPr sz="3200" b="1">
                 <a:solidFill>
@@ -10649,7 +10639,40 @@
       <p:grpSpPr/>
       <p:sp>
         <p:nvSpPr>
-          <p:cNvPr id="2" name="TextBox 1" descr="Section number 04"/>
+          <p:cNvPr id="2" name="Title 1" descr="Slide title: Nonverbal communication"/>
+          <p:cNvSpPr>
+            <a:spLocks noGrp="1"/>
+          </p:cNvSpPr>
+          <p:nvPr>
+            <p:ph type="title"/>
+          </p:nvPr>
+        </p:nvSpPr>
+        <p:spPr>
+          <a:xfrm>
+            <a:off x="822960" y="2834640"/>
+            <a:ext cx="10515600" cy="914400"/>
+          </a:xfrm>
+        </p:spPr>
+        <p:txBody>
+          <a:bodyPr wrap="square"/>
+          <a:lstStyle/>
+          <a:p>
+            <a:pPr algn="l"/>
+            <a:r>
+              <a:rPr sz="4000" b="1">
+                <a:solidFill>
+                  <a:srgbClr val="FFFFFF"/>
+                </a:solidFill>
+                <a:latin typeface="Cambria"/>
+              </a:rPr>
+              <a:t>Nonverbal communication</a:t>
+            </a:r>
+          </a:p>
+        </p:txBody>
+      </p:sp>
+      <p:sp>
+        <p:nvSpPr>
+          <p:cNvPr id="3" name="TextBox 2" descr="Section number 04"/>
           <p:cNvSpPr txBox="1"/>
           <p:nvPr/>
         </p:nvSpPr>
@@ -10682,40 +10705,6 @@
                 <a:latin typeface="Cambria"/>
               </a:rPr>
               <a:t>04</a:t>
-            </a:r>
-          </a:p>
-        </p:txBody>
-      </p:sp>
-      <p:sp>
-        <p:nvSpPr>
-          <p:cNvPr id="3" name="TextBox 2" descr="Slide title: Nonverbal communication"/>
-          <p:cNvSpPr txBox="1"/>
-          <p:nvPr/>
-        </p:nvSpPr>
-        <p:spPr>
-          <a:xfrm>
-            <a:off x="822960" y="2834640"/>
-            <a:ext cx="10515600" cy="914400"/>
-          </a:xfrm>
-          <a:prstGeom prst="rect">
-            <a:avLst/>
-          </a:prstGeom>
-          <a:noFill/>
-        </p:spPr>
-        <p:txBody>
-          <a:bodyPr wrap="square">
-            <a:spAutoFit/>
-          </a:bodyPr>
-          <a:lstStyle/>
-          <a:p>
-            <a:r>
-              <a:rPr sz="4000" b="1">
-                <a:solidFill>
-                  <a:srgbClr val="FFFFFF"/>
-                </a:solidFill>
-                <a:latin typeface="Cambria"/>
-              </a:rPr>
-              <a:t>Nonverbal communication</a:t>
             </a:r>
           </a:p>
         </p:txBody>
@@ -10856,14 +10845,116 @@
       <p:grpSpPr/>
       <p:sp>
         <p:nvSpPr>
-          <p:cNvPr id="2" name="TextBox 1" descr="Slide title: What you'll be able to do after this chapter"/>
-          <p:cNvSpPr txBox="1"/>
-          <p:nvPr/>
+          <p:cNvPr id="2" name="Title 1" descr="Slide title: What you'll be able to do after this chapter"/>
+          <p:cNvSpPr>
+            <a:spLocks noGrp="1"/>
+          </p:cNvSpPr>
+          <p:nvPr>
+            <p:ph type="title"/>
+          </p:nvPr>
         </p:nvSpPr>
         <p:spPr>
           <a:xfrm>
             <a:off x="502920" y="411480"/>
             <a:ext cx="11155680" cy="914400"/>
+          </a:xfrm>
+        </p:spPr>
+        <p:txBody>
+          <a:bodyPr wrap="square"/>
+          <a:lstStyle/>
+          <a:p>
+            <a:pPr algn="l"/>
+            <a:r>
+              <a:rPr sz="3200" b="1">
+                <a:solidFill>
+                  <a:srgbClr val="0E4D33"/>
+                </a:solidFill>
+                <a:latin typeface="Cambria"/>
+              </a:rPr>
+              <a:t>What you'll be able to do after this chapter</a:t>
+            </a:r>
+          </a:p>
+        </p:txBody>
+      </p:sp>
+      <p:sp>
+        <p:nvSpPr>
+          <p:cNvPr id="3" name="TextBox 2" descr="Footer: BADM 225 · Chapter 1"/>
+          <p:cNvSpPr txBox="1"/>
+          <p:nvPr/>
+        </p:nvSpPr>
+        <p:spPr>
+          <a:xfrm>
+            <a:off x="502920" y="6446520"/>
+            <a:ext cx="5486400" cy="320040"/>
+          </a:xfrm>
+          <a:prstGeom prst="rect">
+            <a:avLst/>
+          </a:prstGeom>
+          <a:noFill/>
+        </p:spPr>
+        <p:txBody>
+          <a:bodyPr wrap="none">
+            <a:spAutoFit/>
+          </a:bodyPr>
+          <a:lstStyle/>
+          <a:p>
+            <a:r>
+              <a:rPr sz="1000">
+                <a:solidFill>
+                  <a:srgbClr val="5E6B64"/>
+                </a:solidFill>
+                <a:latin typeface="Calibri"/>
+              </a:rPr>
+              <a:t>BADM 225 · Chapter 1</a:t>
+            </a:r>
+          </a:p>
+        </p:txBody>
+      </p:sp>
+      <p:sp>
+        <p:nvSpPr>
+          <p:cNvPr id="4" name="TextBox 3" descr="Slide number 2"/>
+          <p:cNvSpPr txBox="1"/>
+          <p:nvPr/>
+        </p:nvSpPr>
+        <p:spPr>
+          <a:xfrm>
+            <a:off x="11247120" y="6446520"/>
+            <a:ext cx="640080" cy="320040"/>
+          </a:xfrm>
+          <a:prstGeom prst="rect">
+            <a:avLst/>
+          </a:prstGeom>
+          <a:noFill/>
+        </p:spPr>
+        <p:txBody>
+          <a:bodyPr wrap="none">
+            <a:spAutoFit/>
+          </a:bodyPr>
+          <a:lstStyle/>
+          <a:p>
+            <a:pPr algn="r"/>
+            <a:r>
+              <a:rPr sz="1000">
+                <a:solidFill>
+                  <a:srgbClr val="5E6B64"/>
+                </a:solidFill>
+                <a:latin typeface="Calibri"/>
+              </a:rPr>
+              <a:t>2</a:t>
+            </a:r>
+          </a:p>
+        </p:txBody>
+      </p:sp>
+      <p:sp>
+        <p:nvSpPr>
+          <p:cNvPr id="5" name="TextBox 4" descr="Key points"/>
+          <p:cNvSpPr txBox="1"/>
+          <p:nvPr/>
+        </p:nvSpPr>
+        <p:spPr>
+          <a:xfrm>
+            <a:off x="548640" y="1554480"/>
+            <a:ext cx="11064240" cy="4663440"/>
           </a:xfrm>
           <a:prstGeom prst="rect">
             <a:avLst/>
@@ -10876,108 +10967,39 @@
           </a:bodyPr>
           <a:lstStyle/>
           <a:p>
-            <a:r>
-              <a:rPr sz="3200" b="1">
+            <a:pPr algn="l">
+              <a:spcAft>
+                <a:spcPts val="1200"/>
+              </a:spcAft>
+            </a:pPr>
+            <a:r>
+              <a:rPr sz="1700">
+                <a:solidFill>
+                  <a:srgbClr val="8A6410"/>
+                </a:solidFill>
+                <a:latin typeface="Calibri"/>
+              </a:rPr>
+              <a:t>▪  </a:t>
+            </a:r>
+            <a:r>
+              <a:rPr sz="1700" b="1">
                 <a:solidFill>
                   <a:srgbClr val="0E4D33"/>
                 </a:solidFill>
-                <a:latin typeface="Cambria"/>
-              </a:rPr>
-              <a:t>What you'll be able to do after this chapter</a:t>
-            </a:r>
-          </a:p>
-        </p:txBody>
-      </p:sp>
-      <p:sp>
-        <p:nvSpPr>
-          <p:cNvPr id="3" name="TextBox 2" descr="Footer: BADM 225 · Chapter 1"/>
-          <p:cNvSpPr txBox="1"/>
-          <p:nvPr/>
-        </p:nvSpPr>
-        <p:spPr>
-          <a:xfrm>
-            <a:off x="502920" y="6446520"/>
-            <a:ext cx="5486400" cy="320040"/>
-          </a:xfrm>
-          <a:prstGeom prst="rect">
-            <a:avLst/>
-          </a:prstGeom>
-          <a:noFill/>
-        </p:spPr>
-        <p:txBody>
-          <a:bodyPr wrap="none">
-            <a:spAutoFit/>
-          </a:bodyPr>
-          <a:lstStyle/>
-          <a:p>
-            <a:r>
-              <a:rPr sz="1000">
-                <a:solidFill>
-                  <a:srgbClr val="5E6B64"/>
-                </a:solidFill>
-                <a:latin typeface="Calibri"/>
-              </a:rPr>
-              <a:t>BADM 225 · Chapter 1</a:t>
-            </a:r>
-          </a:p>
-        </p:txBody>
-      </p:sp>
-      <p:sp>
-        <p:nvSpPr>
-          <p:cNvPr id="4" name="TextBox 3" descr="Slide number 2"/>
-          <p:cNvSpPr txBox="1"/>
-          <p:nvPr/>
-        </p:nvSpPr>
-        <p:spPr>
-          <a:xfrm>
-            <a:off x="11247120" y="6446520"/>
-            <a:ext cx="640080" cy="320040"/>
-          </a:xfrm>
-          <a:prstGeom prst="rect">
-            <a:avLst/>
-          </a:prstGeom>
-          <a:noFill/>
-        </p:spPr>
-        <p:txBody>
-          <a:bodyPr wrap="none">
-            <a:spAutoFit/>
-          </a:bodyPr>
-          <a:lstStyle/>
-          <a:p>
-            <a:pPr algn="r"/>
-            <a:r>
-              <a:rPr sz="1000">
-                <a:solidFill>
-                  <a:srgbClr val="5E6B64"/>
-                </a:solidFill>
-                <a:latin typeface="Calibri"/>
-              </a:rPr>
-              <a:t>2</a:t>
-            </a:r>
-          </a:p>
-        </p:txBody>
-      </p:sp>
-      <p:sp>
-        <p:nvSpPr>
-          <p:cNvPr id="5" name="TextBox 4" descr="Key points"/>
-          <p:cNvSpPr txBox="1"/>
-          <p:nvPr/>
-        </p:nvSpPr>
-        <p:spPr>
-          <a:xfrm>
-            <a:off x="548640" y="1554480"/>
-            <a:ext cx="11064240" cy="4663440"/>
-          </a:xfrm>
-          <a:prstGeom prst="rect">
-            <a:avLst/>
-          </a:prstGeom>
-          <a:noFill/>
-        </p:spPr>
-        <p:txBody>
-          <a:bodyPr wrap="square">
-            <a:spAutoFit/>
-          </a:bodyPr>
-          <a:lstStyle/>
+                <a:latin typeface="Calibri"/>
+              </a:rPr>
+              <a:t>Explain  </a:t>
+            </a:r>
+            <a:r>
+              <a:rPr sz="1700" b="0" i="0">
+                <a:solidFill>
+                  <a:srgbClr val="212A26"/>
+                </a:solidFill>
+                <a:latin typeface="Calibri"/>
+              </a:rPr>
+              <a:t>the communication process and identify where messages break down.</a:t>
+            </a:r>
+          </a:p>
           <a:p>
             <a:pPr algn="l">
               <a:spcAft>
@@ -10987,7 +11009,7 @@
             <a:r>
               <a:rPr sz="1700">
                 <a:solidFill>
-                  <a:srgbClr val="C9931A"/>
+                  <a:srgbClr val="8A6410"/>
                 </a:solidFill>
                 <a:latin typeface="Calibri"/>
               </a:rPr>
@@ -11000,7 +11022,7 @@
                 </a:solidFill>
                 <a:latin typeface="Calibri"/>
               </a:rPr>
-              <a:t>Explain  </a:t>
+              <a:t>Choose  </a:t>
             </a:r>
             <a:r>
               <a:rPr sz="1700" b="0" i="0">
@@ -11009,7 +11031,7 @@
                 </a:solidFill>
                 <a:latin typeface="Calibri"/>
               </a:rPr>
-              <a:t>the communication process and identify where messages break down.</a:t>
+              <a:t>the right channel for a message based on richness, sensitivity, and the need for a record.</a:t>
             </a:r>
           </a:p>
           <a:p>
@@ -11021,7 +11043,7 @@
             <a:r>
               <a:rPr sz="1700">
                 <a:solidFill>
-                  <a:srgbClr val="C9931A"/>
+                  <a:srgbClr val="8A6410"/>
                 </a:solidFill>
                 <a:latin typeface="Calibri"/>
               </a:rPr>
@@ -11034,7 +11056,7 @@
                 </a:solidFill>
                 <a:latin typeface="Calibri"/>
               </a:rPr>
-              <a:t>Choose  </a:t>
+              <a:t>Listen  </a:t>
             </a:r>
             <a:r>
               <a:rPr sz="1700" b="0" i="0">
@@ -11043,7 +11065,7 @@
                 </a:solidFill>
                 <a:latin typeface="Calibri"/>
               </a:rPr>
-              <a:t>the right channel for a message based on richness, sensitivity, and the need for a record.</a:t>
+              <a:t>actively — and prove it with paraphrase and follow-up questions.</a:t>
             </a:r>
           </a:p>
           <a:p>
@@ -11055,7 +11077,7 @@
             <a:r>
               <a:rPr sz="1700">
                 <a:solidFill>
-                  <a:srgbClr val="C9931A"/>
+                  <a:srgbClr val="8A6410"/>
                 </a:solidFill>
                 <a:latin typeface="Calibri"/>
               </a:rPr>
@@ -11068,7 +11090,7 @@
                 </a:solidFill>
                 <a:latin typeface="Calibri"/>
               </a:rPr>
-              <a:t>Listen  </a:t>
+              <a:t>Read  </a:t>
             </a:r>
             <a:r>
               <a:rPr sz="1700" b="0" i="0">
@@ -11077,7 +11099,7 @@
                 </a:solidFill>
                 <a:latin typeface="Calibri"/>
               </a:rPr>
-              <a:t>actively — and prove it with paraphrase and follow-up questions.</a:t>
+              <a:t>nonverbal signals and manage the ones you send, in person and on camera.</a:t>
             </a:r>
           </a:p>
           <a:p>
@@ -11089,7 +11111,7 @@
             <a:r>
               <a:rPr sz="1700">
                 <a:solidFill>
-                  <a:srgbClr val="C9931A"/>
+                  <a:srgbClr val="8A6410"/>
                 </a:solidFill>
                 <a:latin typeface="Calibri"/>
               </a:rPr>
@@ -11102,7 +11124,7 @@
                 </a:solidFill>
                 <a:latin typeface="Calibri"/>
               </a:rPr>
-              <a:t>Read  </a:t>
+              <a:t>Apply  </a:t>
             </a:r>
             <a:r>
               <a:rPr sz="1700" b="0" i="0">
@@ -11111,7 +11133,7 @@
                 </a:solidFill>
                 <a:latin typeface="Calibri"/>
               </a:rPr>
-              <a:t>nonverbal signals and manage the ones you send, in person and on camera.</a:t>
+              <a:t>quick ethics tests to everyday workplace decisions.</a:t>
             </a:r>
           </a:p>
           <a:p>
@@ -11123,41 +11145,7 @@
             <a:r>
               <a:rPr sz="1700">
                 <a:solidFill>
-                  <a:srgbClr val="C9931A"/>
-                </a:solidFill>
-                <a:latin typeface="Calibri"/>
-              </a:rPr>
-              <a:t>▪  </a:t>
-            </a:r>
-            <a:r>
-              <a:rPr sz="1700" b="1">
-                <a:solidFill>
-                  <a:srgbClr val="0E4D33"/>
-                </a:solidFill>
-                <a:latin typeface="Calibri"/>
-              </a:rPr>
-              <a:t>Apply  </a:t>
-            </a:r>
-            <a:r>
-              <a:rPr sz="1700" b="0" i="0">
-                <a:solidFill>
-                  <a:srgbClr val="212A26"/>
-                </a:solidFill>
-                <a:latin typeface="Calibri"/>
-              </a:rPr>
-              <a:t>quick ethics tests to everyday workplace decisions.</a:t>
-            </a:r>
-          </a:p>
-          <a:p>
-            <a:pPr algn="l">
-              <a:spcAft>
-                <a:spcPts val="1200"/>
-              </a:spcAft>
-            </a:pPr>
-            <a:r>
-              <a:rPr sz="1700">
-                <a:solidFill>
-                  <a:srgbClr val="C9931A"/>
+                  <a:srgbClr val="8A6410"/>
                 </a:solidFill>
                 <a:latin typeface="Calibri"/>
               </a:rPr>
@@ -11212,26 +11200,25 @@
       <p:grpSpPr/>
       <p:sp>
         <p:nvSpPr>
-          <p:cNvPr id="2" name="TextBox 1" descr="Slide title: The channels you're always transmitting on"/>
-          <p:cNvSpPr txBox="1"/>
-          <p:nvPr/>
+          <p:cNvPr id="2" name="Title 1" descr="Slide title: The channels you're always transmitting on"/>
+          <p:cNvSpPr>
+            <a:spLocks noGrp="1"/>
+          </p:cNvSpPr>
+          <p:nvPr>
+            <p:ph type="title"/>
+          </p:nvPr>
         </p:nvSpPr>
         <p:spPr>
           <a:xfrm>
             <a:off x="502920" y="411480"/>
             <a:ext cx="11155680" cy="914400"/>
           </a:xfrm>
-          <a:prstGeom prst="rect">
-            <a:avLst/>
-          </a:prstGeom>
-          <a:noFill/>
-        </p:spPr>
-        <p:txBody>
-          <a:bodyPr wrap="square">
-            <a:spAutoFit/>
-          </a:bodyPr>
-          <a:lstStyle/>
-          <a:p>
+        </p:spPr>
+        <p:txBody>
+          <a:bodyPr wrap="square"/>
+          <a:lstStyle/>
+          <a:p>
+            <a:pPr algn="l"/>
             <a:r>
               <a:rPr sz="3200" b="1">
                 <a:solidFill>
@@ -11881,26 +11868,25 @@
       <p:grpSpPr/>
       <p:sp>
         <p:nvSpPr>
-          <p:cNvPr id="2" name="TextBox 1" descr="Slide title: When words and body language disagree"/>
-          <p:cNvSpPr txBox="1"/>
-          <p:nvPr/>
+          <p:cNvPr id="2" name="Title 1" descr="Slide title: When words and body language disagree"/>
+          <p:cNvSpPr>
+            <a:spLocks noGrp="1"/>
+          </p:cNvSpPr>
+          <p:nvPr>
+            <p:ph type="title"/>
+          </p:nvPr>
         </p:nvSpPr>
         <p:spPr>
           <a:xfrm>
             <a:off x="502920" y="411480"/>
             <a:ext cx="11155680" cy="914400"/>
           </a:xfrm>
-          <a:prstGeom prst="rect">
-            <a:avLst/>
-          </a:prstGeom>
-          <a:noFill/>
-        </p:spPr>
-        <p:txBody>
-          <a:bodyPr wrap="square">
-            <a:spAutoFit/>
-          </a:bodyPr>
-          <a:lstStyle/>
-          <a:p>
+        </p:spPr>
+        <p:txBody>
+          <a:bodyPr wrap="square"/>
+          <a:lstStyle/>
+          <a:p>
+            <a:pPr algn="l"/>
             <a:r>
               <a:rPr sz="3200" b="1">
                 <a:solidFill>
@@ -12085,7 +12071,7 @@
             <a:r>
               <a:rPr sz="1600">
                 <a:solidFill>
-                  <a:srgbClr val="C9931A"/>
+                  <a:srgbClr val="8A6410"/>
                 </a:solidFill>
                 <a:latin typeface="Calibri"/>
               </a:rPr>
@@ -12119,7 +12105,7 @@
             <a:r>
               <a:rPr sz="1600">
                 <a:solidFill>
-                  <a:srgbClr val="C9931A"/>
+                  <a:srgbClr val="8A6410"/>
                 </a:solidFill>
                 <a:latin typeface="Calibri"/>
               </a:rPr>
@@ -12153,7 +12139,7 @@
             <a:r>
               <a:rPr sz="1600">
                 <a:solidFill>
-                  <a:srgbClr val="C9931A"/>
+                  <a:srgbClr val="8A6410"/>
                 </a:solidFill>
                 <a:latin typeface="Calibri"/>
               </a:rPr>
@@ -12208,26 +12194,25 @@
       <p:grpSpPr/>
       <p:sp>
         <p:nvSpPr>
-          <p:cNvPr id="2" name="TextBox 1" descr="Slide title: Nonverbal signals on camera and in writing"/>
-          <p:cNvSpPr txBox="1"/>
-          <p:nvPr/>
+          <p:cNvPr id="2" name="Title 1" descr="Slide title: Nonverbal signals on camera and in writing"/>
+          <p:cNvSpPr>
+            <a:spLocks noGrp="1"/>
+          </p:cNvSpPr>
+          <p:nvPr>
+            <p:ph type="title"/>
+          </p:nvPr>
         </p:nvSpPr>
         <p:spPr>
           <a:xfrm>
             <a:off x="502920" y="411480"/>
             <a:ext cx="11155680" cy="914400"/>
           </a:xfrm>
-          <a:prstGeom prst="rect">
-            <a:avLst/>
-          </a:prstGeom>
-          <a:noFill/>
-        </p:spPr>
-        <p:txBody>
-          <a:bodyPr wrap="square">
-            <a:spAutoFit/>
-          </a:bodyPr>
-          <a:lstStyle/>
-          <a:p>
+        </p:spPr>
+        <p:txBody>
+          <a:bodyPr wrap="square"/>
+          <a:lstStyle/>
+          <a:p>
+            <a:pPr algn="l"/>
             <a:r>
               <a:rPr sz="3200" b="1">
                 <a:solidFill>
@@ -12373,7 +12358,7 @@
             <a:r>
               <a:rPr sz="1500">
                 <a:solidFill>
-                  <a:srgbClr val="C9931A"/>
+                  <a:srgbClr val="8A6410"/>
                 </a:solidFill>
                 <a:latin typeface="Calibri"/>
               </a:rPr>
@@ -12398,7 +12383,7 @@
             <a:r>
               <a:rPr sz="1500">
                 <a:solidFill>
-                  <a:srgbClr val="C9931A"/>
+                  <a:srgbClr val="8A6410"/>
                 </a:solidFill>
                 <a:latin typeface="Calibri"/>
               </a:rPr>
@@ -12423,7 +12408,7 @@
             <a:r>
               <a:rPr sz="1500">
                 <a:solidFill>
-                  <a:srgbClr val="C9931A"/>
+                  <a:srgbClr val="8A6410"/>
                 </a:solidFill>
                 <a:latin typeface="Calibri"/>
               </a:rPr>
@@ -12448,7 +12433,7 @@
             <a:r>
               <a:rPr sz="1500">
                 <a:solidFill>
-                  <a:srgbClr val="C9931A"/>
+                  <a:srgbClr val="8A6410"/>
                 </a:solidFill>
                 <a:latin typeface="Calibri"/>
               </a:rPr>
@@ -12530,7 +12515,7 @@
             <a:r>
               <a:rPr sz="1500">
                 <a:solidFill>
-                  <a:srgbClr val="C9931A"/>
+                  <a:srgbClr val="8A6410"/>
                 </a:solidFill>
                 <a:latin typeface="Calibri"/>
               </a:rPr>
@@ -12555,7 +12540,7 @@
             <a:r>
               <a:rPr sz="1500">
                 <a:solidFill>
-                  <a:srgbClr val="C9931A"/>
+                  <a:srgbClr val="8A6410"/>
                 </a:solidFill>
                 <a:latin typeface="Calibri"/>
               </a:rPr>
@@ -12580,7 +12565,7 @@
             <a:r>
               <a:rPr sz="1500">
                 <a:solidFill>
-                  <a:srgbClr val="C9931A"/>
+                  <a:srgbClr val="8A6410"/>
                 </a:solidFill>
                 <a:latin typeface="Calibri"/>
               </a:rPr>
@@ -12605,7 +12590,7 @@
             <a:r>
               <a:rPr sz="1500">
                 <a:solidFill>
-                  <a:srgbClr val="C9931A"/>
+                  <a:srgbClr val="8A6410"/>
                 </a:solidFill>
                 <a:latin typeface="Calibri"/>
               </a:rPr>
@@ -12651,7 +12636,40 @@
       <p:grpSpPr/>
       <p:sp>
         <p:nvSpPr>
-          <p:cNvPr id="2" name="TextBox 1" descr="Section number 05"/>
+          <p:cNvPr id="2" name="Title 1" descr="Slide title: Communicating across cultures"/>
+          <p:cNvSpPr>
+            <a:spLocks noGrp="1"/>
+          </p:cNvSpPr>
+          <p:nvPr>
+            <p:ph type="title"/>
+          </p:nvPr>
+        </p:nvSpPr>
+        <p:spPr>
+          <a:xfrm>
+            <a:off x="822960" y="2834640"/>
+            <a:ext cx="10515600" cy="914400"/>
+          </a:xfrm>
+        </p:spPr>
+        <p:txBody>
+          <a:bodyPr wrap="square"/>
+          <a:lstStyle/>
+          <a:p>
+            <a:pPr algn="l"/>
+            <a:r>
+              <a:rPr sz="4000" b="1">
+                <a:solidFill>
+                  <a:srgbClr val="FFFFFF"/>
+                </a:solidFill>
+                <a:latin typeface="Cambria"/>
+              </a:rPr>
+              <a:t>Communicating across cultures</a:t>
+            </a:r>
+          </a:p>
+        </p:txBody>
+      </p:sp>
+      <p:sp>
+        <p:nvSpPr>
+          <p:cNvPr id="3" name="TextBox 2" descr="Section number 05"/>
           <p:cNvSpPr txBox="1"/>
           <p:nvPr/>
         </p:nvSpPr>
@@ -12684,40 +12702,6 @@
                 <a:latin typeface="Cambria"/>
               </a:rPr>
               <a:t>05</a:t>
-            </a:r>
-          </a:p>
-        </p:txBody>
-      </p:sp>
-      <p:sp>
-        <p:nvSpPr>
-          <p:cNvPr id="3" name="TextBox 2" descr="Slide title: Communicating across cultures"/>
-          <p:cNvSpPr txBox="1"/>
-          <p:nvPr/>
-        </p:nvSpPr>
-        <p:spPr>
-          <a:xfrm>
-            <a:off x="822960" y="2834640"/>
-            <a:ext cx="10515600" cy="914400"/>
-          </a:xfrm>
-          <a:prstGeom prst="rect">
-            <a:avLst/>
-          </a:prstGeom>
-          <a:noFill/>
-        </p:spPr>
-        <p:txBody>
-          <a:bodyPr wrap="square">
-            <a:spAutoFit/>
-          </a:bodyPr>
-          <a:lstStyle/>
-          <a:p>
-            <a:r>
-              <a:rPr sz="4000" b="1">
-                <a:solidFill>
-                  <a:srgbClr val="FFFFFF"/>
-                </a:solidFill>
-                <a:latin typeface="Cambria"/>
-              </a:rPr>
-              <a:t>Communicating across cultures</a:t>
             </a:r>
           </a:p>
         </p:txBody>
@@ -12858,26 +12842,25 @@
       <p:grpSpPr/>
       <p:sp>
         <p:nvSpPr>
-          <p:cNvPr id="2" name="TextBox 1" descr="Slide title: High-context vs. low-context communication"/>
-          <p:cNvSpPr txBox="1"/>
-          <p:nvPr/>
+          <p:cNvPr id="2" name="Title 1" descr="Slide title: High-context vs. low-context communication"/>
+          <p:cNvSpPr>
+            <a:spLocks noGrp="1"/>
+          </p:cNvSpPr>
+          <p:nvPr>
+            <p:ph type="title"/>
+          </p:nvPr>
         </p:nvSpPr>
         <p:spPr>
           <a:xfrm>
             <a:off x="502920" y="411480"/>
             <a:ext cx="11155680" cy="914400"/>
           </a:xfrm>
-          <a:prstGeom prst="rect">
-            <a:avLst/>
-          </a:prstGeom>
-          <a:noFill/>
-        </p:spPr>
-        <p:txBody>
-          <a:bodyPr wrap="square">
-            <a:spAutoFit/>
-          </a:bodyPr>
-          <a:lstStyle/>
-          <a:p>
+        </p:spPr>
+        <p:txBody>
+          <a:bodyPr wrap="square"/>
+          <a:lstStyle/>
+          <a:p>
+            <a:pPr algn="l"/>
             <a:r>
               <a:rPr sz="3200" b="1">
                 <a:solidFill>
@@ -13023,7 +13006,7 @@
             <a:r>
               <a:rPr sz="1500">
                 <a:solidFill>
-                  <a:srgbClr val="C9931A"/>
+                  <a:srgbClr val="8A6410"/>
                 </a:solidFill>
                 <a:latin typeface="Calibri"/>
               </a:rPr>
@@ -13048,7 +13031,7 @@
             <a:r>
               <a:rPr sz="1500">
                 <a:solidFill>
-                  <a:srgbClr val="C9931A"/>
+                  <a:srgbClr val="8A6410"/>
                 </a:solidFill>
                 <a:latin typeface="Calibri"/>
               </a:rPr>
@@ -13073,7 +13056,7 @@
             <a:r>
               <a:rPr sz="1500">
                 <a:solidFill>
-                  <a:srgbClr val="C9931A"/>
+                  <a:srgbClr val="8A6410"/>
                 </a:solidFill>
                 <a:latin typeface="Calibri"/>
               </a:rPr>
@@ -13098,7 +13081,7 @@
             <a:r>
               <a:rPr sz="1500">
                 <a:solidFill>
-                  <a:srgbClr val="C9931A"/>
+                  <a:srgbClr val="8A6410"/>
                 </a:solidFill>
                 <a:latin typeface="Calibri"/>
               </a:rPr>
@@ -13180,7 +13163,7 @@
             <a:r>
               <a:rPr sz="1500">
                 <a:solidFill>
-                  <a:srgbClr val="C9931A"/>
+                  <a:srgbClr val="8A6410"/>
                 </a:solidFill>
                 <a:latin typeface="Calibri"/>
               </a:rPr>
@@ -13205,7 +13188,7 @@
             <a:r>
               <a:rPr sz="1500">
                 <a:solidFill>
-                  <a:srgbClr val="C9931A"/>
+                  <a:srgbClr val="8A6410"/>
                 </a:solidFill>
                 <a:latin typeface="Calibri"/>
               </a:rPr>
@@ -13230,7 +13213,7 @@
             <a:r>
               <a:rPr sz="1500">
                 <a:solidFill>
-                  <a:srgbClr val="C9931A"/>
+                  <a:srgbClr val="8A6410"/>
                 </a:solidFill>
                 <a:latin typeface="Calibri"/>
               </a:rPr>
@@ -13255,7 +13238,7 @@
             <a:r>
               <a:rPr sz="1500">
                 <a:solidFill>
-                  <a:srgbClr val="C9931A"/>
+                  <a:srgbClr val="8A6410"/>
                 </a:solidFill>
                 <a:latin typeface="Calibri"/>
               </a:rPr>
@@ -13301,14 +13284,116 @@
       <p:grpSpPr/>
       <p:sp>
         <p:nvSpPr>
-          <p:cNvPr id="2" name="TextBox 1" descr="Slide title: Working across cultures without stepping on rakes"/>
-          <p:cNvSpPr txBox="1"/>
-          <p:nvPr/>
+          <p:cNvPr id="2" name="Title 1" descr="Slide title: Working across cultures without stepping on rakes"/>
+          <p:cNvSpPr>
+            <a:spLocks noGrp="1"/>
+          </p:cNvSpPr>
+          <p:nvPr>
+            <p:ph type="title"/>
+          </p:nvPr>
         </p:nvSpPr>
         <p:spPr>
           <a:xfrm>
             <a:off x="502920" y="411480"/>
             <a:ext cx="11155680" cy="914400"/>
+          </a:xfrm>
+        </p:spPr>
+        <p:txBody>
+          <a:bodyPr wrap="square"/>
+          <a:lstStyle/>
+          <a:p>
+            <a:pPr algn="l"/>
+            <a:r>
+              <a:rPr sz="3200" b="1">
+                <a:solidFill>
+                  <a:srgbClr val="0E4D33"/>
+                </a:solidFill>
+                <a:latin typeface="Cambria"/>
+              </a:rPr>
+              <a:t>Working across cultures without stepping on rakes</a:t>
+            </a:r>
+          </a:p>
+        </p:txBody>
+      </p:sp>
+      <p:sp>
+        <p:nvSpPr>
+          <p:cNvPr id="3" name="TextBox 2" descr="Footer: BADM 225 · Chapter 1"/>
+          <p:cNvSpPr txBox="1"/>
+          <p:nvPr/>
+        </p:nvSpPr>
+        <p:spPr>
+          <a:xfrm>
+            <a:off x="502920" y="6446520"/>
+            <a:ext cx="5486400" cy="320040"/>
+          </a:xfrm>
+          <a:prstGeom prst="rect">
+            <a:avLst/>
+          </a:prstGeom>
+          <a:noFill/>
+        </p:spPr>
+        <p:txBody>
+          <a:bodyPr wrap="none">
+            <a:spAutoFit/>
+          </a:bodyPr>
+          <a:lstStyle/>
+          <a:p>
+            <a:r>
+              <a:rPr sz="1000">
+                <a:solidFill>
+                  <a:srgbClr val="5E6B64"/>
+                </a:solidFill>
+                <a:latin typeface="Calibri"/>
+              </a:rPr>
+              <a:t>BADM 225 · Chapter 1</a:t>
+            </a:r>
+          </a:p>
+        </p:txBody>
+      </p:sp>
+      <p:sp>
+        <p:nvSpPr>
+          <p:cNvPr id="4" name="TextBox 3" descr="Slide number 25"/>
+          <p:cNvSpPr txBox="1"/>
+          <p:nvPr/>
+        </p:nvSpPr>
+        <p:spPr>
+          <a:xfrm>
+            <a:off x="11247120" y="6446520"/>
+            <a:ext cx="640080" cy="320040"/>
+          </a:xfrm>
+          <a:prstGeom prst="rect">
+            <a:avLst/>
+          </a:prstGeom>
+          <a:noFill/>
+        </p:spPr>
+        <p:txBody>
+          <a:bodyPr wrap="none">
+            <a:spAutoFit/>
+          </a:bodyPr>
+          <a:lstStyle/>
+          <a:p>
+            <a:pPr algn="r"/>
+            <a:r>
+              <a:rPr sz="1000">
+                <a:solidFill>
+                  <a:srgbClr val="5E6B64"/>
+                </a:solidFill>
+                <a:latin typeface="Calibri"/>
+              </a:rPr>
+              <a:t>25</a:t>
+            </a:r>
+          </a:p>
+        </p:txBody>
+      </p:sp>
+      <p:sp>
+        <p:nvSpPr>
+          <p:cNvPr id="5" name="TextBox 4" descr="Key points"/>
+          <p:cNvSpPr txBox="1"/>
+          <p:nvPr/>
+        </p:nvSpPr>
+        <p:spPr>
+          <a:xfrm>
+            <a:off x="548640" y="1554480"/>
+            <a:ext cx="11064240" cy="4663440"/>
           </a:xfrm>
           <a:prstGeom prst="rect">
             <a:avLst/>
@@ -13321,108 +13406,39 @@
           </a:bodyPr>
           <a:lstStyle/>
           <a:p>
-            <a:r>
-              <a:rPr sz="3200" b="1">
+            <a:pPr algn="l">
+              <a:spcAft>
+                <a:spcPts val="1200"/>
+              </a:spcAft>
+            </a:pPr>
+            <a:r>
+              <a:rPr sz="1700">
+                <a:solidFill>
+                  <a:srgbClr val="8A6410"/>
+                </a:solidFill>
+                <a:latin typeface="Calibri"/>
+              </a:rPr>
+              <a:t>▪  </a:t>
+            </a:r>
+            <a:r>
+              <a:rPr sz="1700" b="1">
                 <a:solidFill>
                   <a:srgbClr val="0E4D33"/>
                 </a:solidFill>
-                <a:latin typeface="Cambria"/>
-              </a:rPr>
-              <a:t>Working across cultures without stepping on rakes</a:t>
-            </a:r>
-          </a:p>
-        </p:txBody>
-      </p:sp>
-      <p:sp>
-        <p:nvSpPr>
-          <p:cNvPr id="3" name="TextBox 2" descr="Footer: BADM 225 · Chapter 1"/>
-          <p:cNvSpPr txBox="1"/>
-          <p:nvPr/>
-        </p:nvSpPr>
-        <p:spPr>
-          <a:xfrm>
-            <a:off x="502920" y="6446520"/>
-            <a:ext cx="5486400" cy="320040"/>
-          </a:xfrm>
-          <a:prstGeom prst="rect">
-            <a:avLst/>
-          </a:prstGeom>
-          <a:noFill/>
-        </p:spPr>
-        <p:txBody>
-          <a:bodyPr wrap="none">
-            <a:spAutoFit/>
-          </a:bodyPr>
-          <a:lstStyle/>
-          <a:p>
-            <a:r>
-              <a:rPr sz="1000">
-                <a:solidFill>
-                  <a:srgbClr val="5E6B64"/>
-                </a:solidFill>
-                <a:latin typeface="Calibri"/>
-              </a:rPr>
-              <a:t>BADM 225 · Chapter 1</a:t>
-            </a:r>
-          </a:p>
-        </p:txBody>
-      </p:sp>
-      <p:sp>
-        <p:nvSpPr>
-          <p:cNvPr id="4" name="TextBox 3" descr="Slide number 25"/>
-          <p:cNvSpPr txBox="1"/>
-          <p:nvPr/>
-        </p:nvSpPr>
-        <p:spPr>
-          <a:xfrm>
-            <a:off x="11247120" y="6446520"/>
-            <a:ext cx="640080" cy="320040"/>
-          </a:xfrm>
-          <a:prstGeom prst="rect">
-            <a:avLst/>
-          </a:prstGeom>
-          <a:noFill/>
-        </p:spPr>
-        <p:txBody>
-          <a:bodyPr wrap="none">
-            <a:spAutoFit/>
-          </a:bodyPr>
-          <a:lstStyle/>
-          <a:p>
-            <a:pPr algn="r"/>
-            <a:r>
-              <a:rPr sz="1000">
-                <a:solidFill>
-                  <a:srgbClr val="5E6B64"/>
-                </a:solidFill>
-                <a:latin typeface="Calibri"/>
-              </a:rPr>
-              <a:t>25</a:t>
-            </a:r>
-          </a:p>
-        </p:txBody>
-      </p:sp>
-      <p:sp>
-        <p:nvSpPr>
-          <p:cNvPr id="5" name="TextBox 4" descr="Key points"/>
-          <p:cNvSpPr txBox="1"/>
-          <p:nvPr/>
-        </p:nvSpPr>
-        <p:spPr>
-          <a:xfrm>
-            <a:off x="548640" y="1554480"/>
-            <a:ext cx="11064240" cy="4663440"/>
-          </a:xfrm>
-          <a:prstGeom prst="rect">
-            <a:avLst/>
-          </a:prstGeom>
-          <a:noFill/>
-        </p:spPr>
-        <p:txBody>
-          <a:bodyPr wrap="square">
-            <a:spAutoFit/>
-          </a:bodyPr>
-          <a:lstStyle/>
+                <a:latin typeface="Calibri"/>
+              </a:rPr>
+              <a:t>Slow down the judgment.  </a:t>
+            </a:r>
+            <a:r>
+              <a:rPr sz="1700" b="0" i="0">
+                <a:solidFill>
+                  <a:srgbClr val="212A26"/>
+                </a:solidFill>
+                <a:latin typeface="Calibri"/>
+              </a:rPr>
+              <a:t>When something reads as rude or evasive, first ask whether it's a style difference.</a:t>
+            </a:r>
+          </a:p>
           <a:p>
             <a:pPr algn="l">
               <a:spcAft>
@@ -13432,7 +13448,7 @@
             <a:r>
               <a:rPr sz="1700">
                 <a:solidFill>
-                  <a:srgbClr val="C9931A"/>
+                  <a:srgbClr val="8A6410"/>
                 </a:solidFill>
                 <a:latin typeface="Calibri"/>
               </a:rPr>
@@ -13445,7 +13461,7 @@
                 </a:solidFill>
                 <a:latin typeface="Calibri"/>
               </a:rPr>
-              <a:t>Slow down the judgment.  </a:t>
+              <a:t>Write plainly.  </a:t>
             </a:r>
             <a:r>
               <a:rPr sz="1700" b="0" i="0">
@@ -13454,7 +13470,7 @@
                 </a:solidFill>
                 <a:latin typeface="Calibri"/>
               </a:rPr>
-              <a:t>When something reads as rude or evasive, first ask whether it's a style difference.</a:t>
+              <a:t>Short sentences, no idioms or sports metaphors — “touch base” and “home run” don't travel.</a:t>
             </a:r>
           </a:p>
           <a:p>
@@ -13466,7 +13482,7 @@
             <a:r>
               <a:rPr sz="1700">
                 <a:solidFill>
-                  <a:srgbClr val="C9931A"/>
+                  <a:srgbClr val="8A6410"/>
                 </a:solidFill>
                 <a:latin typeface="Calibri"/>
               </a:rPr>
@@ -13479,7 +13495,7 @@
                 </a:solidFill>
                 <a:latin typeface="Calibri"/>
               </a:rPr>
-              <a:t>Write plainly.  </a:t>
+              <a:t>Confirm in writing.  </a:t>
             </a:r>
             <a:r>
               <a:rPr sz="1700" b="0" i="0">
@@ -13488,7 +13504,7 @@
                 </a:solidFill>
                 <a:latin typeface="Calibri"/>
               </a:rPr>
-              <a:t>Short sentences, no idioms or sports metaphors — “touch base” and “home run” don't travel.</a:t>
+              <a:t>After spoken agreements, send a short summary — it catches decode errors gently.</a:t>
             </a:r>
           </a:p>
           <a:p>
@@ -13500,7 +13516,7 @@
             <a:r>
               <a:rPr sz="1700">
                 <a:solidFill>
-                  <a:srgbClr val="C9931A"/>
+                  <a:srgbClr val="8A6410"/>
                 </a:solidFill>
                 <a:latin typeface="Calibri"/>
               </a:rPr>
@@ -13513,7 +13529,7 @@
                 </a:solidFill>
                 <a:latin typeface="Calibri"/>
               </a:rPr>
-              <a:t>Confirm in writing.  </a:t>
+              <a:t>Watch the calendar and the clock.  </a:t>
             </a:r>
             <a:r>
               <a:rPr sz="1700" b="0" i="0">
@@ -13522,7 +13538,7 @@
                 </a:solidFill>
                 <a:latin typeface="Calibri"/>
               </a:rPr>
-              <a:t>After spoken agreements, send a short summary — it catches decode errors gently.</a:t>
+              <a:t>Holidays, workweeks, and norms about punctuality differ; assume nothing.</a:t>
             </a:r>
           </a:p>
           <a:p>
@@ -13534,41 +13550,7 @@
             <a:r>
               <a:rPr sz="1700">
                 <a:solidFill>
-                  <a:srgbClr val="C9931A"/>
-                </a:solidFill>
-                <a:latin typeface="Calibri"/>
-              </a:rPr>
-              <a:t>▪  </a:t>
-            </a:r>
-            <a:r>
-              <a:rPr sz="1700" b="1">
-                <a:solidFill>
-                  <a:srgbClr val="0E4D33"/>
-                </a:solidFill>
-                <a:latin typeface="Calibri"/>
-              </a:rPr>
-              <a:t>Watch the calendar and the clock.  </a:t>
-            </a:r>
-            <a:r>
-              <a:rPr sz="1700" b="0" i="0">
-                <a:solidFill>
-                  <a:srgbClr val="212A26"/>
-                </a:solidFill>
-                <a:latin typeface="Calibri"/>
-              </a:rPr>
-              <a:t>Holidays, workweeks, and norms about punctuality differ; assume nothing.</a:t>
-            </a:r>
-          </a:p>
-          <a:p>
-            <a:pPr algn="l">
-              <a:spcAft>
-                <a:spcPts val="1200"/>
-              </a:spcAft>
-            </a:pPr>
-            <a:r>
-              <a:rPr sz="1700">
-                <a:solidFill>
-                  <a:srgbClr val="C9931A"/>
+                  <a:srgbClr val="8A6410"/>
                 </a:solidFill>
                 <a:latin typeface="Calibri"/>
               </a:rPr>
@@ -13623,7 +13605,40 @@
       <p:grpSpPr/>
       <p:sp>
         <p:nvSpPr>
-          <p:cNvPr id="2" name="TextBox 1" descr="Section number 06"/>
+          <p:cNvPr id="2" name="Title 1" descr="Slide title: Ethics and professionalism"/>
+          <p:cNvSpPr>
+            <a:spLocks noGrp="1"/>
+          </p:cNvSpPr>
+          <p:nvPr>
+            <p:ph type="title"/>
+          </p:nvPr>
+        </p:nvSpPr>
+        <p:spPr>
+          <a:xfrm>
+            <a:off x="822960" y="2834640"/>
+            <a:ext cx="10515600" cy="914400"/>
+          </a:xfrm>
+        </p:spPr>
+        <p:txBody>
+          <a:bodyPr wrap="square"/>
+          <a:lstStyle/>
+          <a:p>
+            <a:pPr algn="l"/>
+            <a:r>
+              <a:rPr sz="4000" b="1">
+                <a:solidFill>
+                  <a:srgbClr val="FFFFFF"/>
+                </a:solidFill>
+                <a:latin typeface="Cambria"/>
+              </a:rPr>
+              <a:t>Ethics and professionalism</a:t>
+            </a:r>
+          </a:p>
+        </p:txBody>
+      </p:sp>
+      <p:sp>
+        <p:nvSpPr>
+          <p:cNvPr id="3" name="TextBox 2" descr="Section number 06"/>
           <p:cNvSpPr txBox="1"/>
           <p:nvPr/>
         </p:nvSpPr>
@@ -13656,40 +13671,6 @@
                 <a:latin typeface="Cambria"/>
               </a:rPr>
               <a:t>06</a:t>
-            </a:r>
-          </a:p>
-        </p:txBody>
-      </p:sp>
-      <p:sp>
-        <p:nvSpPr>
-          <p:cNvPr id="3" name="TextBox 2" descr="Slide title: Ethics and professionalism"/>
-          <p:cNvSpPr txBox="1"/>
-          <p:nvPr/>
-        </p:nvSpPr>
-        <p:spPr>
-          <a:xfrm>
-            <a:off x="822960" y="2834640"/>
-            <a:ext cx="10515600" cy="914400"/>
-          </a:xfrm>
-          <a:prstGeom prst="rect">
-            <a:avLst/>
-          </a:prstGeom>
-          <a:noFill/>
-        </p:spPr>
-        <p:txBody>
-          <a:bodyPr wrap="square">
-            <a:spAutoFit/>
-          </a:bodyPr>
-          <a:lstStyle/>
-          <a:p>
-            <a:r>
-              <a:rPr sz="4000" b="1">
-                <a:solidFill>
-                  <a:srgbClr val="FFFFFF"/>
-                </a:solidFill>
-                <a:latin typeface="Cambria"/>
-              </a:rPr>
-              <a:t>Ethics and professionalism</a:t>
             </a:r>
           </a:p>
         </p:txBody>
@@ -13830,26 +13811,25 @@
       <p:grpSpPr/>
       <p:sp>
         <p:nvSpPr>
-          <p:cNvPr id="2" name="TextBox 1" descr="Slide title: Ethical dilemma vs. ethical lapse — know the difference"/>
-          <p:cNvSpPr txBox="1"/>
-          <p:nvPr/>
+          <p:cNvPr id="2" name="Title 1" descr="Slide title: Ethical dilemma vs. ethical lapse — know the difference"/>
+          <p:cNvSpPr>
+            <a:spLocks noGrp="1"/>
+          </p:cNvSpPr>
+          <p:nvPr>
+            <p:ph type="title"/>
+          </p:nvPr>
         </p:nvSpPr>
         <p:spPr>
           <a:xfrm>
             <a:off x="502920" y="411480"/>
             <a:ext cx="11155680" cy="914400"/>
           </a:xfrm>
-          <a:prstGeom prst="rect">
-            <a:avLst/>
-          </a:prstGeom>
-          <a:noFill/>
-        </p:spPr>
-        <p:txBody>
-          <a:bodyPr wrap="square">
-            <a:spAutoFit/>
-          </a:bodyPr>
-          <a:lstStyle/>
-          <a:p>
+        </p:spPr>
+        <p:txBody>
+          <a:bodyPr wrap="square"/>
+          <a:lstStyle/>
+          <a:p>
+            <a:pPr algn="l"/>
             <a:r>
               <a:rPr sz="3200" b="1">
                 <a:solidFill>
@@ -13995,7 +13975,7 @@
             <a:r>
               <a:rPr sz="1500">
                 <a:solidFill>
-                  <a:srgbClr val="C9931A"/>
+                  <a:srgbClr val="8A6410"/>
                 </a:solidFill>
                 <a:latin typeface="Calibri"/>
               </a:rPr>
@@ -14020,7 +14000,7 @@
             <a:r>
               <a:rPr sz="1500">
                 <a:solidFill>
-                  <a:srgbClr val="C9931A"/>
+                  <a:srgbClr val="8A6410"/>
                 </a:solidFill>
                 <a:latin typeface="Calibri"/>
               </a:rPr>
@@ -14045,7 +14025,7 @@
             <a:r>
               <a:rPr sz="1500">
                 <a:solidFill>
-                  <a:srgbClr val="C9931A"/>
+                  <a:srgbClr val="8A6410"/>
                 </a:solidFill>
                 <a:latin typeface="Calibri"/>
               </a:rPr>
@@ -14070,7 +14050,7 @@
             <a:r>
               <a:rPr sz="1500">
                 <a:solidFill>
-                  <a:srgbClr val="C9931A"/>
+                  <a:srgbClr val="8A6410"/>
                 </a:solidFill>
                 <a:latin typeface="Calibri"/>
               </a:rPr>
@@ -14161,7 +14141,7 @@
             <a:r>
               <a:rPr sz="1500">
                 <a:solidFill>
-                  <a:srgbClr val="C9931A"/>
+                  <a:srgbClr val="8A6410"/>
                 </a:solidFill>
                 <a:latin typeface="Calibri"/>
               </a:rPr>
@@ -14186,7 +14166,7 @@
             <a:r>
               <a:rPr sz="1500">
                 <a:solidFill>
-                  <a:srgbClr val="C9931A"/>
+                  <a:srgbClr val="8A6410"/>
                 </a:solidFill>
                 <a:latin typeface="Calibri"/>
               </a:rPr>
@@ -14211,7 +14191,7 @@
             <a:r>
               <a:rPr sz="1500">
                 <a:solidFill>
-                  <a:srgbClr val="C9931A"/>
+                  <a:srgbClr val="8A6410"/>
                 </a:solidFill>
                 <a:latin typeface="Calibri"/>
               </a:rPr>
@@ -14236,7 +14216,7 @@
             <a:r>
               <a:rPr sz="1500">
                 <a:solidFill>
-                  <a:srgbClr val="C9931A"/>
+                  <a:srgbClr val="8A6410"/>
                 </a:solidFill>
                 <a:latin typeface="Calibri"/>
               </a:rPr>
@@ -14291,26 +14271,25 @@
       <p:grpSpPr/>
       <p:sp>
         <p:nvSpPr>
-          <p:cNvPr id="2" name="TextBox 1" descr="Slide title: Four quick tests before you hit send"/>
-          <p:cNvSpPr txBox="1"/>
-          <p:nvPr/>
+          <p:cNvPr id="2" name="Title 1" descr="Slide title: Four quick tests before you hit send"/>
+          <p:cNvSpPr>
+            <a:spLocks noGrp="1"/>
+          </p:cNvSpPr>
+          <p:nvPr>
+            <p:ph type="title"/>
+          </p:nvPr>
         </p:nvSpPr>
         <p:spPr>
           <a:xfrm>
             <a:off x="502920" y="411480"/>
             <a:ext cx="11155680" cy="914400"/>
           </a:xfrm>
-          <a:prstGeom prst="rect">
-            <a:avLst/>
-          </a:prstGeom>
-          <a:noFill/>
-        </p:spPr>
-        <p:txBody>
-          <a:bodyPr wrap="square">
-            <a:spAutoFit/>
-          </a:bodyPr>
-          <a:lstStyle/>
-          <a:p>
+        </p:spPr>
+        <p:txBody>
+          <a:bodyPr wrap="square"/>
+          <a:lstStyle/>
+          <a:p>
+            <a:pPr algn="l"/>
             <a:r>
               <a:rPr sz="3200" b="1">
                 <a:solidFill>
@@ -14852,14 +14831,116 @@
       <p:grpSpPr/>
       <p:sp>
         <p:nvSpPr>
-          <p:cNvPr id="2" name="TextBox 1" descr="Slide title: Professionalism: the daily behaviors that build trust"/>
-          <p:cNvSpPr txBox="1"/>
-          <p:nvPr/>
+          <p:cNvPr id="2" name="Title 1" descr="Slide title: Professionalism: the daily behaviors that build trust"/>
+          <p:cNvSpPr>
+            <a:spLocks noGrp="1"/>
+          </p:cNvSpPr>
+          <p:nvPr>
+            <p:ph type="title"/>
+          </p:nvPr>
         </p:nvSpPr>
         <p:spPr>
           <a:xfrm>
             <a:off x="502920" y="411480"/>
             <a:ext cx="11155680" cy="914400"/>
+          </a:xfrm>
+        </p:spPr>
+        <p:txBody>
+          <a:bodyPr wrap="square"/>
+          <a:lstStyle/>
+          <a:p>
+            <a:pPr algn="l"/>
+            <a:r>
+              <a:rPr sz="3200" b="1">
+                <a:solidFill>
+                  <a:srgbClr val="0E4D33"/>
+                </a:solidFill>
+                <a:latin typeface="Cambria"/>
+              </a:rPr>
+              <a:t>Professionalism: the daily behaviors that build trust</a:t>
+            </a:r>
+          </a:p>
+        </p:txBody>
+      </p:sp>
+      <p:sp>
+        <p:nvSpPr>
+          <p:cNvPr id="3" name="TextBox 2" descr="Footer: BADM 225 · Chapter 1"/>
+          <p:cNvSpPr txBox="1"/>
+          <p:nvPr/>
+        </p:nvSpPr>
+        <p:spPr>
+          <a:xfrm>
+            <a:off x="502920" y="6446520"/>
+            <a:ext cx="5486400" cy="320040"/>
+          </a:xfrm>
+          <a:prstGeom prst="rect">
+            <a:avLst/>
+          </a:prstGeom>
+          <a:noFill/>
+        </p:spPr>
+        <p:txBody>
+          <a:bodyPr wrap="none">
+            <a:spAutoFit/>
+          </a:bodyPr>
+          <a:lstStyle/>
+          <a:p>
+            <a:r>
+              <a:rPr sz="1000">
+                <a:solidFill>
+                  <a:srgbClr val="5E6B64"/>
+                </a:solidFill>
+                <a:latin typeface="Calibri"/>
+              </a:rPr>
+              <a:t>BADM 225 · Chapter 1</a:t>
+            </a:r>
+          </a:p>
+        </p:txBody>
+      </p:sp>
+      <p:sp>
+        <p:nvSpPr>
+          <p:cNvPr id="4" name="TextBox 3" descr="Slide number 29"/>
+          <p:cNvSpPr txBox="1"/>
+          <p:nvPr/>
+        </p:nvSpPr>
+        <p:spPr>
+          <a:xfrm>
+            <a:off x="11247120" y="6446520"/>
+            <a:ext cx="640080" cy="320040"/>
+          </a:xfrm>
+          <a:prstGeom prst="rect">
+            <a:avLst/>
+          </a:prstGeom>
+          <a:noFill/>
+        </p:spPr>
+        <p:txBody>
+          <a:bodyPr wrap="none">
+            <a:spAutoFit/>
+          </a:bodyPr>
+          <a:lstStyle/>
+          <a:p>
+            <a:pPr algn="r"/>
+            <a:r>
+              <a:rPr sz="1000">
+                <a:solidFill>
+                  <a:srgbClr val="5E6B64"/>
+                </a:solidFill>
+                <a:latin typeface="Calibri"/>
+              </a:rPr>
+              <a:t>29</a:t>
+            </a:r>
+          </a:p>
+        </p:txBody>
+      </p:sp>
+      <p:sp>
+        <p:nvSpPr>
+          <p:cNvPr id="5" name="TextBox 4" descr="Key points"/>
+          <p:cNvSpPr txBox="1"/>
+          <p:nvPr/>
+        </p:nvSpPr>
+        <p:spPr>
+          <a:xfrm>
+            <a:off x="548640" y="1554480"/>
+            <a:ext cx="11064240" cy="4663440"/>
           </a:xfrm>
           <a:prstGeom prst="rect">
             <a:avLst/>
@@ -14872,108 +14953,39 @@
           </a:bodyPr>
           <a:lstStyle/>
           <a:p>
-            <a:r>
-              <a:rPr sz="3200" b="1">
+            <a:pPr algn="l">
+              <a:spcAft>
+                <a:spcPts val="1200"/>
+              </a:spcAft>
+            </a:pPr>
+            <a:r>
+              <a:rPr sz="1700">
+                <a:solidFill>
+                  <a:srgbClr val="8A6410"/>
+                </a:solidFill>
+                <a:latin typeface="Calibri"/>
+              </a:rPr>
+              <a:t>▪  </a:t>
+            </a:r>
+            <a:r>
+              <a:rPr sz="1700" b="1">
                 <a:solidFill>
                   <a:srgbClr val="0E4D33"/>
                 </a:solidFill>
-                <a:latin typeface="Cambria"/>
-              </a:rPr>
-              <a:t>Professionalism: the daily behaviors that build trust</a:t>
-            </a:r>
-          </a:p>
-        </p:txBody>
-      </p:sp>
-      <p:sp>
-        <p:nvSpPr>
-          <p:cNvPr id="3" name="TextBox 2" descr="Footer: BADM 225 · Chapter 1"/>
-          <p:cNvSpPr txBox="1"/>
-          <p:nvPr/>
-        </p:nvSpPr>
-        <p:spPr>
-          <a:xfrm>
-            <a:off x="502920" y="6446520"/>
-            <a:ext cx="5486400" cy="320040"/>
-          </a:xfrm>
-          <a:prstGeom prst="rect">
-            <a:avLst/>
-          </a:prstGeom>
-          <a:noFill/>
-        </p:spPr>
-        <p:txBody>
-          <a:bodyPr wrap="none">
-            <a:spAutoFit/>
-          </a:bodyPr>
-          <a:lstStyle/>
-          <a:p>
-            <a:r>
-              <a:rPr sz="1000">
-                <a:solidFill>
-                  <a:srgbClr val="5E6B64"/>
-                </a:solidFill>
-                <a:latin typeface="Calibri"/>
-              </a:rPr>
-              <a:t>BADM 225 · Chapter 1</a:t>
-            </a:r>
-          </a:p>
-        </p:txBody>
-      </p:sp>
-      <p:sp>
-        <p:nvSpPr>
-          <p:cNvPr id="4" name="TextBox 3" descr="Slide number 29"/>
-          <p:cNvSpPr txBox="1"/>
-          <p:nvPr/>
-        </p:nvSpPr>
-        <p:spPr>
-          <a:xfrm>
-            <a:off x="11247120" y="6446520"/>
-            <a:ext cx="640080" cy="320040"/>
-          </a:xfrm>
-          <a:prstGeom prst="rect">
-            <a:avLst/>
-          </a:prstGeom>
-          <a:noFill/>
-        </p:spPr>
-        <p:txBody>
-          <a:bodyPr wrap="none">
-            <a:spAutoFit/>
-          </a:bodyPr>
-          <a:lstStyle/>
-          <a:p>
-            <a:pPr algn="r"/>
-            <a:r>
-              <a:rPr sz="1000">
-                <a:solidFill>
-                  <a:srgbClr val="5E6B64"/>
-                </a:solidFill>
-                <a:latin typeface="Calibri"/>
-              </a:rPr>
-              <a:t>29</a:t>
-            </a:r>
-          </a:p>
-        </p:txBody>
-      </p:sp>
-      <p:sp>
-        <p:nvSpPr>
-          <p:cNvPr id="5" name="TextBox 4" descr="Key points"/>
-          <p:cNvSpPr txBox="1"/>
-          <p:nvPr/>
-        </p:nvSpPr>
-        <p:spPr>
-          <a:xfrm>
-            <a:off x="548640" y="1554480"/>
-            <a:ext cx="11064240" cy="4663440"/>
-          </a:xfrm>
-          <a:prstGeom prst="rect">
-            <a:avLst/>
-          </a:prstGeom>
-          <a:noFill/>
-        </p:spPr>
-        <p:txBody>
-          <a:bodyPr wrap="square">
-            <a:spAutoFit/>
-          </a:bodyPr>
-          <a:lstStyle/>
+                <a:latin typeface="Calibri"/>
+              </a:rPr>
+              <a:t>Reliability.  </a:t>
+            </a:r>
+            <a:r>
+              <a:rPr sz="1700" b="0" i="0">
+                <a:solidFill>
+                  <a:srgbClr val="212A26"/>
+                </a:solidFill>
+                <a:latin typeface="Calibri"/>
+              </a:rPr>
+              <a:t>Deadlines met, promises kept, meetings attended on time — trust is built on boring consistency.</a:t>
+            </a:r>
+          </a:p>
           <a:p>
             <a:pPr algn="l">
               <a:spcAft>
@@ -14983,7 +14995,7 @@
             <a:r>
               <a:rPr sz="1700">
                 <a:solidFill>
-                  <a:srgbClr val="C9931A"/>
+                  <a:srgbClr val="8A6410"/>
                 </a:solidFill>
                 <a:latin typeface="Calibri"/>
               </a:rPr>
@@ -14996,7 +15008,7 @@
                 </a:solidFill>
                 <a:latin typeface="Calibri"/>
               </a:rPr>
-              <a:t>Reliability.  </a:t>
+              <a:t>Responsiveness.  </a:t>
             </a:r>
             <a:r>
               <a:rPr sz="1700" b="0" i="0">
@@ -15005,7 +15017,7 @@
                 </a:solidFill>
                 <a:latin typeface="Calibri"/>
               </a:rPr>
-              <a:t>Deadlines met, promises kept, meetings attended on time — trust is built on boring consistency.</a:t>
+              <a:t>Acknowledge messages within a business day, even if the full answer comes later.</a:t>
             </a:r>
           </a:p>
           <a:p>
@@ -15017,7 +15029,7 @@
             <a:r>
               <a:rPr sz="1700">
                 <a:solidFill>
-                  <a:srgbClr val="C9931A"/>
+                  <a:srgbClr val="8A6410"/>
                 </a:solidFill>
                 <a:latin typeface="Calibri"/>
               </a:rPr>
@@ -15030,7 +15042,7 @@
                 </a:solidFill>
                 <a:latin typeface="Calibri"/>
               </a:rPr>
-              <a:t>Responsiveness.  </a:t>
+              <a:t>Polish.  </a:t>
             </a:r>
             <a:r>
               <a:rPr sz="1700" b="0" i="0">
@@ -15039,7 +15051,7 @@
                 </a:solidFill>
                 <a:latin typeface="Calibri"/>
               </a:rPr>
-              <a:t>Acknowledge messages within a business day, even if the full answer comes later.</a:t>
+              <a:t>Proofread everything; a typo in your email is a smudge on your credibility.</a:t>
             </a:r>
           </a:p>
           <a:p>
@@ -15051,7 +15063,7 @@
             <a:r>
               <a:rPr sz="1700">
                 <a:solidFill>
-                  <a:srgbClr val="C9931A"/>
+                  <a:srgbClr val="8A6410"/>
                 </a:solidFill>
                 <a:latin typeface="Calibri"/>
               </a:rPr>
@@ -15064,7 +15076,7 @@
                 </a:solidFill>
                 <a:latin typeface="Calibri"/>
               </a:rPr>
-              <a:t>Polish.  </a:t>
+              <a:t>Composure.  </a:t>
             </a:r>
             <a:r>
               <a:rPr sz="1700" b="0" i="0">
@@ -15073,7 +15085,7 @@
                 </a:solidFill>
                 <a:latin typeface="Calibri"/>
               </a:rPr>
-              <a:t>Proofread everything; a typo in your email is a smudge on your credibility.</a:t>
+              <a:t>Never send angry. Draft it, sleep on it, edit it — or delete it.</a:t>
             </a:r>
           </a:p>
           <a:p>
@@ -15085,41 +15097,7 @@
             <a:r>
               <a:rPr sz="1700">
                 <a:solidFill>
-                  <a:srgbClr val="C9931A"/>
-                </a:solidFill>
-                <a:latin typeface="Calibri"/>
-              </a:rPr>
-              <a:t>▪  </a:t>
-            </a:r>
-            <a:r>
-              <a:rPr sz="1700" b="1">
-                <a:solidFill>
-                  <a:srgbClr val="0E4D33"/>
-                </a:solidFill>
-                <a:latin typeface="Calibri"/>
-              </a:rPr>
-              <a:t>Composure.  </a:t>
-            </a:r>
-            <a:r>
-              <a:rPr sz="1700" b="0" i="0">
-                <a:solidFill>
-                  <a:srgbClr val="212A26"/>
-                </a:solidFill>
-                <a:latin typeface="Calibri"/>
-              </a:rPr>
-              <a:t>Never send angry. Draft it, sleep on it, edit it — or delete it.</a:t>
-            </a:r>
-          </a:p>
-          <a:p>
-            <a:pPr algn="l">
-              <a:spcAft>
-                <a:spcPts val="1200"/>
-              </a:spcAft>
-            </a:pPr>
-            <a:r>
-              <a:rPr sz="1700">
-                <a:solidFill>
-                  <a:srgbClr val="C9931A"/>
+                  <a:srgbClr val="8A6410"/>
                 </a:solidFill>
                 <a:latin typeface="Calibri"/>
               </a:rPr>
@@ -15174,26 +15152,25 @@
       <p:grpSpPr/>
       <p:sp>
         <p:nvSpPr>
-          <p:cNvPr id="2" name="TextBox 1" descr="Slide title: The most portable skill you will ever build"/>
-          <p:cNvSpPr txBox="1"/>
-          <p:nvPr/>
+          <p:cNvPr id="2" name="Title 1" descr="Slide title: The most portable skill you will ever build"/>
+          <p:cNvSpPr>
+            <a:spLocks noGrp="1"/>
+          </p:cNvSpPr>
+          <p:nvPr>
+            <p:ph type="title"/>
+          </p:nvPr>
         </p:nvSpPr>
         <p:spPr>
           <a:xfrm>
             <a:off x="502920" y="411480"/>
             <a:ext cx="11155680" cy="914400"/>
           </a:xfrm>
-          <a:prstGeom prst="rect">
-            <a:avLst/>
-          </a:prstGeom>
-          <a:noFill/>
-        </p:spPr>
-        <p:txBody>
-          <a:bodyPr wrap="square">
-            <a:spAutoFit/>
-          </a:bodyPr>
-          <a:lstStyle/>
-          <a:p>
+        </p:spPr>
+        <p:txBody>
+          <a:bodyPr wrap="square"/>
+          <a:lstStyle/>
+          <a:p>
+            <a:pPr algn="l"/>
             <a:r>
               <a:rPr sz="3200" b="1">
                 <a:solidFill>
@@ -15378,7 +15355,7 @@
             <a:r>
               <a:rPr sz="1600">
                 <a:solidFill>
-                  <a:srgbClr val="C9931A"/>
+                  <a:srgbClr val="8A6410"/>
                 </a:solidFill>
                 <a:latin typeface="Calibri"/>
               </a:rPr>
@@ -15412,7 +15389,7 @@
             <a:r>
               <a:rPr sz="1600">
                 <a:solidFill>
-                  <a:srgbClr val="C9931A"/>
+                  <a:srgbClr val="8A6410"/>
                 </a:solidFill>
                 <a:latin typeface="Calibri"/>
               </a:rPr>
@@ -15446,7 +15423,7 @@
             <a:r>
               <a:rPr sz="1600">
                 <a:solidFill>
-                  <a:srgbClr val="C9931A"/>
+                  <a:srgbClr val="8A6410"/>
                 </a:solidFill>
                 <a:latin typeface="Calibri"/>
               </a:rPr>
@@ -15501,26 +15478,25 @@
       <p:grpSpPr/>
       <p:sp>
         <p:nvSpPr>
-          <p:cNvPr id="2" name="TextBox 1" descr="Slide title: Social media: the permanent record you're writing"/>
-          <p:cNvSpPr txBox="1"/>
-          <p:nvPr/>
+          <p:cNvPr id="2" name="Title 1" descr="Slide title: Social media: the permanent record you're writing"/>
+          <p:cNvSpPr>
+            <a:spLocks noGrp="1"/>
+          </p:cNvSpPr>
+          <p:nvPr>
+            <p:ph type="title"/>
+          </p:nvPr>
         </p:nvSpPr>
         <p:spPr>
           <a:xfrm>
             <a:off x="502920" y="411480"/>
             <a:ext cx="11155680" cy="914400"/>
           </a:xfrm>
-          <a:prstGeom prst="rect">
-            <a:avLst/>
-          </a:prstGeom>
-          <a:noFill/>
-        </p:spPr>
-        <p:txBody>
-          <a:bodyPr wrap="square">
-            <a:spAutoFit/>
-          </a:bodyPr>
-          <a:lstStyle/>
-          <a:p>
+        </p:spPr>
+        <p:txBody>
+          <a:bodyPr wrap="square"/>
+          <a:lstStyle/>
+          <a:p>
+            <a:pPr algn="l"/>
             <a:r>
               <a:rPr sz="3200" b="1">
                 <a:solidFill>
@@ -15705,7 +15681,7 @@
             <a:r>
               <a:rPr sz="1600">
                 <a:solidFill>
-                  <a:srgbClr val="C9931A"/>
+                  <a:srgbClr val="8A6410"/>
                 </a:solidFill>
                 <a:latin typeface="Calibri"/>
               </a:rPr>
@@ -15739,7 +15715,7 @@
             <a:r>
               <a:rPr sz="1600">
                 <a:solidFill>
-                  <a:srgbClr val="C9931A"/>
+                  <a:srgbClr val="8A6410"/>
                 </a:solidFill>
                 <a:latin typeface="Calibri"/>
               </a:rPr>
@@ -15773,7 +15749,7 @@
             <a:r>
               <a:rPr sz="1600">
                 <a:solidFill>
-                  <a:srgbClr val="C9931A"/>
+                  <a:srgbClr val="8A6410"/>
                 </a:solidFill>
                 <a:latin typeface="Calibri"/>
               </a:rPr>
@@ -15828,14 +15804,116 @@
       <p:grpSpPr/>
       <p:sp>
         <p:nvSpPr>
-          <p:cNvPr id="2" name="TextBox 1" descr="Slide title: Communicating when nobody can see you working"/>
-          <p:cNvSpPr txBox="1"/>
-          <p:nvPr/>
+          <p:cNvPr id="2" name="Title 1" descr="Slide title: Communicating when nobody can see you working"/>
+          <p:cNvSpPr>
+            <a:spLocks noGrp="1"/>
+          </p:cNvSpPr>
+          <p:nvPr>
+            <p:ph type="title"/>
+          </p:nvPr>
         </p:nvSpPr>
         <p:spPr>
           <a:xfrm>
             <a:off x="502920" y="411480"/>
             <a:ext cx="11155680" cy="914400"/>
+          </a:xfrm>
+        </p:spPr>
+        <p:txBody>
+          <a:bodyPr wrap="square"/>
+          <a:lstStyle/>
+          <a:p>
+            <a:pPr algn="l"/>
+            <a:r>
+              <a:rPr sz="3200" b="1">
+                <a:solidFill>
+                  <a:srgbClr val="0E4D33"/>
+                </a:solidFill>
+                <a:latin typeface="Cambria"/>
+              </a:rPr>
+              <a:t>Communicating when nobody can see you working</a:t>
+            </a:r>
+          </a:p>
+        </p:txBody>
+      </p:sp>
+      <p:sp>
+        <p:nvSpPr>
+          <p:cNvPr id="3" name="TextBox 2" descr="Footer: BADM 225 · Chapter 1"/>
+          <p:cNvSpPr txBox="1"/>
+          <p:nvPr/>
+        </p:nvSpPr>
+        <p:spPr>
+          <a:xfrm>
+            <a:off x="502920" y="6446520"/>
+            <a:ext cx="5486400" cy="320040"/>
+          </a:xfrm>
+          <a:prstGeom prst="rect">
+            <a:avLst/>
+          </a:prstGeom>
+          <a:noFill/>
+        </p:spPr>
+        <p:txBody>
+          <a:bodyPr wrap="none">
+            <a:spAutoFit/>
+          </a:bodyPr>
+          <a:lstStyle/>
+          <a:p>
+            <a:r>
+              <a:rPr sz="1000">
+                <a:solidFill>
+                  <a:srgbClr val="5E6B64"/>
+                </a:solidFill>
+                <a:latin typeface="Calibri"/>
+              </a:rPr>
+              <a:t>BADM 225 · Chapter 1</a:t>
+            </a:r>
+          </a:p>
+        </p:txBody>
+      </p:sp>
+      <p:sp>
+        <p:nvSpPr>
+          <p:cNvPr id="4" name="TextBox 3" descr="Slide number 31"/>
+          <p:cNvSpPr txBox="1"/>
+          <p:nvPr/>
+        </p:nvSpPr>
+        <p:spPr>
+          <a:xfrm>
+            <a:off x="11247120" y="6446520"/>
+            <a:ext cx="640080" cy="320040"/>
+          </a:xfrm>
+          <a:prstGeom prst="rect">
+            <a:avLst/>
+          </a:prstGeom>
+          <a:noFill/>
+        </p:spPr>
+        <p:txBody>
+          <a:bodyPr wrap="none">
+            <a:spAutoFit/>
+          </a:bodyPr>
+          <a:lstStyle/>
+          <a:p>
+            <a:pPr algn="r"/>
+            <a:r>
+              <a:rPr sz="1000">
+                <a:solidFill>
+                  <a:srgbClr val="5E6B64"/>
+                </a:solidFill>
+                <a:latin typeface="Calibri"/>
+              </a:rPr>
+              <a:t>31</a:t>
+            </a:r>
+          </a:p>
+        </p:txBody>
+      </p:sp>
+      <p:sp>
+        <p:nvSpPr>
+          <p:cNvPr id="5" name="TextBox 4" descr="Key points"/>
+          <p:cNvSpPr txBox="1"/>
+          <p:nvPr/>
+        </p:nvSpPr>
+        <p:spPr>
+          <a:xfrm>
+            <a:off x="548640" y="1554480"/>
+            <a:ext cx="11064240" cy="4663440"/>
           </a:xfrm>
           <a:prstGeom prst="rect">
             <a:avLst/>
@@ -15848,108 +15926,39 @@
           </a:bodyPr>
           <a:lstStyle/>
           <a:p>
-            <a:r>
-              <a:rPr sz="3200" b="1">
+            <a:pPr algn="l">
+              <a:spcAft>
+                <a:spcPts val="1200"/>
+              </a:spcAft>
+            </a:pPr>
+            <a:r>
+              <a:rPr sz="1700">
+                <a:solidFill>
+                  <a:srgbClr val="8A6410"/>
+                </a:solidFill>
+                <a:latin typeface="Calibri"/>
+              </a:rPr>
+              <a:t>▪  </a:t>
+            </a:r>
+            <a:r>
+              <a:rPr sz="1700" b="1">
                 <a:solidFill>
                   <a:srgbClr val="0E4D33"/>
                 </a:solidFill>
-                <a:latin typeface="Cambria"/>
-              </a:rPr>
-              <a:t>Communicating when nobody can see you working</a:t>
-            </a:r>
-          </a:p>
-        </p:txBody>
-      </p:sp>
-      <p:sp>
-        <p:nvSpPr>
-          <p:cNvPr id="3" name="TextBox 2" descr="Footer: BADM 225 · Chapter 1"/>
-          <p:cNvSpPr txBox="1"/>
-          <p:nvPr/>
-        </p:nvSpPr>
-        <p:spPr>
-          <a:xfrm>
-            <a:off x="502920" y="6446520"/>
-            <a:ext cx="5486400" cy="320040"/>
-          </a:xfrm>
-          <a:prstGeom prst="rect">
-            <a:avLst/>
-          </a:prstGeom>
-          <a:noFill/>
-        </p:spPr>
-        <p:txBody>
-          <a:bodyPr wrap="none">
-            <a:spAutoFit/>
-          </a:bodyPr>
-          <a:lstStyle/>
-          <a:p>
-            <a:r>
-              <a:rPr sz="1000">
-                <a:solidFill>
-                  <a:srgbClr val="5E6B64"/>
-                </a:solidFill>
-                <a:latin typeface="Calibri"/>
-              </a:rPr>
-              <a:t>BADM 225 · Chapter 1</a:t>
-            </a:r>
-          </a:p>
-        </p:txBody>
-      </p:sp>
-      <p:sp>
-        <p:nvSpPr>
-          <p:cNvPr id="4" name="TextBox 3" descr="Slide number 31"/>
-          <p:cNvSpPr txBox="1"/>
-          <p:nvPr/>
-        </p:nvSpPr>
-        <p:spPr>
-          <a:xfrm>
-            <a:off x="11247120" y="6446520"/>
-            <a:ext cx="640080" cy="320040"/>
-          </a:xfrm>
-          <a:prstGeom prst="rect">
-            <a:avLst/>
-          </a:prstGeom>
-          <a:noFill/>
-        </p:spPr>
-        <p:txBody>
-          <a:bodyPr wrap="none">
-            <a:spAutoFit/>
-          </a:bodyPr>
-          <a:lstStyle/>
-          <a:p>
-            <a:pPr algn="r"/>
-            <a:r>
-              <a:rPr sz="1000">
-                <a:solidFill>
-                  <a:srgbClr val="5E6B64"/>
-                </a:solidFill>
-                <a:latin typeface="Calibri"/>
-              </a:rPr>
-              <a:t>31</a:t>
-            </a:r>
-          </a:p>
-        </p:txBody>
-      </p:sp>
-      <p:sp>
-        <p:nvSpPr>
-          <p:cNvPr id="5" name="TextBox 4" descr="Key points"/>
-          <p:cNvSpPr txBox="1"/>
-          <p:nvPr/>
-        </p:nvSpPr>
-        <p:spPr>
-          <a:xfrm>
-            <a:off x="548640" y="1554480"/>
-            <a:ext cx="11064240" cy="4663440"/>
-          </a:xfrm>
-          <a:prstGeom prst="rect">
-            <a:avLst/>
-          </a:prstGeom>
-          <a:noFill/>
-        </p:spPr>
-        <p:txBody>
-          <a:bodyPr wrap="square">
-            <a:spAutoFit/>
-          </a:bodyPr>
-          <a:lstStyle/>
+                <a:latin typeface="Calibri"/>
+              </a:rPr>
+              <a:t>Overcommunicate status.  </a:t>
+            </a:r>
+            <a:r>
+              <a:rPr sz="1700" b="0" i="0">
+                <a:solidFill>
+                  <a:srgbClr val="212A26"/>
+                </a:solidFill>
+                <a:latin typeface="Calibri"/>
+              </a:rPr>
+              <a:t>Distributed teams can't see effort — visible written updates replace the hallway.</a:t>
+            </a:r>
+          </a:p>
           <a:p>
             <a:pPr algn="l">
               <a:spcAft>
@@ -15959,7 +15968,7 @@
             <a:r>
               <a:rPr sz="1700">
                 <a:solidFill>
-                  <a:srgbClr val="C9931A"/>
+                  <a:srgbClr val="8A6410"/>
                 </a:solidFill>
                 <a:latin typeface="Calibri"/>
               </a:rPr>
@@ -15972,7 +15981,7 @@
                 </a:solidFill>
                 <a:latin typeface="Calibri"/>
               </a:rPr>
-              <a:t>Overcommunicate status.  </a:t>
+              <a:t>Default to writing.  </a:t>
             </a:r>
             <a:r>
               <a:rPr sz="1700" b="0" i="0">
@@ -15981,7 +15990,7 @@
                 </a:solidFill>
                 <a:latin typeface="Calibri"/>
               </a:rPr>
-              <a:t>Distributed teams can't see effort — visible written updates replace the hallway.</a:t>
+              <a:t>Decisions made in calls get a two-line written summary; unwritten decisions evaporate.</a:t>
             </a:r>
           </a:p>
           <a:p>
@@ -15993,7 +16002,7 @@
             <a:r>
               <a:rPr sz="1700">
                 <a:solidFill>
-                  <a:srgbClr val="C9931A"/>
+                  <a:srgbClr val="8A6410"/>
                 </a:solidFill>
                 <a:latin typeface="Calibri"/>
               </a:rPr>
@@ -16006,7 +16015,7 @@
                 </a:solidFill>
                 <a:latin typeface="Calibri"/>
               </a:rPr>
-              <a:t>Default to writing.  </a:t>
+              <a:t>Respect asynchrony.  </a:t>
             </a:r>
             <a:r>
               <a:rPr sz="1700" b="0" i="0">
@@ -16015,7 +16024,7 @@
                 </a:solidFill>
                 <a:latin typeface="Calibri"/>
               </a:rPr>
-              <a:t>Decisions made in calls get a two-line written summary; unwritten decisions evaporate.</a:t>
+              <a:t>Write messages that can be answered hours later without a follow-up question.</a:t>
             </a:r>
           </a:p>
           <a:p>
@@ -16027,7 +16036,7 @@
             <a:r>
               <a:rPr sz="1700">
                 <a:solidFill>
-                  <a:srgbClr val="C9931A"/>
+                  <a:srgbClr val="8A6410"/>
                 </a:solidFill>
                 <a:latin typeface="Calibri"/>
               </a:rPr>
@@ -16040,7 +16049,7 @@
                 </a:solidFill>
                 <a:latin typeface="Calibri"/>
               </a:rPr>
-              <a:t>Respect asynchrony.  </a:t>
+              <a:t>Guard the rich channels.  </a:t>
             </a:r>
             <a:r>
               <a:rPr sz="1700" b="0" i="0">
@@ -16049,7 +16058,7 @@
                 </a:solidFill>
                 <a:latin typeface="Calibri"/>
               </a:rPr>
-              <a:t>Write messages that can be answered hours later without a follow-up question.</a:t>
+              <a:t>Use live meetings for what actually needs them: conflict, complexity, connection.</a:t>
             </a:r>
           </a:p>
           <a:p>
@@ -16061,41 +16070,7 @@
             <a:r>
               <a:rPr sz="1700">
                 <a:solidFill>
-                  <a:srgbClr val="C9931A"/>
-                </a:solidFill>
-                <a:latin typeface="Calibri"/>
-              </a:rPr>
-              <a:t>▪  </a:t>
-            </a:r>
-            <a:r>
-              <a:rPr sz="1700" b="1">
-                <a:solidFill>
-                  <a:srgbClr val="0E4D33"/>
-                </a:solidFill>
-                <a:latin typeface="Calibri"/>
-              </a:rPr>
-              <a:t>Guard the rich channels.  </a:t>
-            </a:r>
-            <a:r>
-              <a:rPr sz="1700" b="0" i="0">
-                <a:solidFill>
-                  <a:srgbClr val="212A26"/>
-                </a:solidFill>
-                <a:latin typeface="Calibri"/>
-              </a:rPr>
-              <a:t>Use live meetings for what actually needs them: conflict, complexity, connection.</a:t>
-            </a:r>
-          </a:p>
-          <a:p>
-            <a:pPr algn="l">
-              <a:spcAft>
-                <a:spcPts val="1200"/>
-              </a:spcAft>
-            </a:pPr>
-            <a:r>
-              <a:rPr sz="1700">
-                <a:solidFill>
-                  <a:srgbClr val="C9931A"/>
+                  <a:srgbClr val="8A6410"/>
                 </a:solidFill>
                 <a:latin typeface="Calibri"/>
               </a:rPr>
@@ -16150,14 +16125,116 @@
       <p:grpSpPr/>
       <p:sp>
         <p:nvSpPr>
-          <p:cNvPr id="2" name="TextBox 1" descr="Slide title: A word about AI — your new co-writer (and its limits)"/>
-          <p:cNvSpPr txBox="1"/>
-          <p:nvPr/>
+          <p:cNvPr id="2" name="Title 1" descr="Slide title: A word about AI — your new co-writer (and its limits)"/>
+          <p:cNvSpPr>
+            <a:spLocks noGrp="1"/>
+          </p:cNvSpPr>
+          <p:nvPr>
+            <p:ph type="title"/>
+          </p:nvPr>
         </p:nvSpPr>
         <p:spPr>
           <a:xfrm>
             <a:off x="502920" y="411480"/>
             <a:ext cx="11155680" cy="914400"/>
+          </a:xfrm>
+        </p:spPr>
+        <p:txBody>
+          <a:bodyPr wrap="square"/>
+          <a:lstStyle/>
+          <a:p>
+            <a:pPr algn="l"/>
+            <a:r>
+              <a:rPr sz="3200" b="1">
+                <a:solidFill>
+                  <a:srgbClr val="0E4D33"/>
+                </a:solidFill>
+                <a:latin typeface="Cambria"/>
+              </a:rPr>
+              <a:t>A word about AI — your new co-writer (and its limits)</a:t>
+            </a:r>
+          </a:p>
+        </p:txBody>
+      </p:sp>
+      <p:sp>
+        <p:nvSpPr>
+          <p:cNvPr id="3" name="TextBox 2" descr="Footer: BADM 225 · Chapter 1"/>
+          <p:cNvSpPr txBox="1"/>
+          <p:nvPr/>
+        </p:nvSpPr>
+        <p:spPr>
+          <a:xfrm>
+            <a:off x="502920" y="6446520"/>
+            <a:ext cx="5486400" cy="320040"/>
+          </a:xfrm>
+          <a:prstGeom prst="rect">
+            <a:avLst/>
+          </a:prstGeom>
+          <a:noFill/>
+        </p:spPr>
+        <p:txBody>
+          <a:bodyPr wrap="none">
+            <a:spAutoFit/>
+          </a:bodyPr>
+          <a:lstStyle/>
+          <a:p>
+            <a:r>
+              <a:rPr sz="1000">
+                <a:solidFill>
+                  <a:srgbClr val="5E6B64"/>
+                </a:solidFill>
+                <a:latin typeface="Calibri"/>
+              </a:rPr>
+              <a:t>BADM 225 · Chapter 1</a:t>
+            </a:r>
+          </a:p>
+        </p:txBody>
+      </p:sp>
+      <p:sp>
+        <p:nvSpPr>
+          <p:cNvPr id="4" name="TextBox 3" descr="Slide number 32"/>
+          <p:cNvSpPr txBox="1"/>
+          <p:nvPr/>
+        </p:nvSpPr>
+        <p:spPr>
+          <a:xfrm>
+            <a:off x="11247120" y="6446520"/>
+            <a:ext cx="640080" cy="320040"/>
+          </a:xfrm>
+          <a:prstGeom prst="rect">
+            <a:avLst/>
+          </a:prstGeom>
+          <a:noFill/>
+        </p:spPr>
+        <p:txBody>
+          <a:bodyPr wrap="none">
+            <a:spAutoFit/>
+          </a:bodyPr>
+          <a:lstStyle/>
+          <a:p>
+            <a:pPr algn="r"/>
+            <a:r>
+              <a:rPr sz="1000">
+                <a:solidFill>
+                  <a:srgbClr val="5E6B64"/>
+                </a:solidFill>
+                <a:latin typeface="Calibri"/>
+              </a:rPr>
+              <a:t>32</a:t>
+            </a:r>
+          </a:p>
+        </p:txBody>
+      </p:sp>
+      <p:sp>
+        <p:nvSpPr>
+          <p:cNvPr id="5" name="TextBox 4" descr="Key points"/>
+          <p:cNvSpPr txBox="1"/>
+          <p:nvPr/>
+        </p:nvSpPr>
+        <p:spPr>
+          <a:xfrm>
+            <a:off x="548640" y="1554480"/>
+            <a:ext cx="11064240" cy="4663440"/>
           </a:xfrm>
           <a:prstGeom prst="rect">
             <a:avLst/>
@@ -16170,108 +16247,39 @@
           </a:bodyPr>
           <a:lstStyle/>
           <a:p>
-            <a:r>
-              <a:rPr sz="3200" b="1">
+            <a:pPr algn="l">
+              <a:spcAft>
+                <a:spcPts val="1200"/>
+              </a:spcAft>
+            </a:pPr>
+            <a:r>
+              <a:rPr sz="1700">
+                <a:solidFill>
+                  <a:srgbClr val="8A6410"/>
+                </a:solidFill>
+                <a:latin typeface="Calibri"/>
+              </a:rPr>
+              <a:t>▪  </a:t>
+            </a:r>
+            <a:r>
+              <a:rPr sz="1700" b="1">
                 <a:solidFill>
                   <a:srgbClr val="0E4D33"/>
                 </a:solidFill>
-                <a:latin typeface="Cambria"/>
-              </a:rPr>
-              <a:t>A word about AI — your new co-writer (and its limits)</a:t>
-            </a:r>
-          </a:p>
-        </p:txBody>
-      </p:sp>
-      <p:sp>
-        <p:nvSpPr>
-          <p:cNvPr id="3" name="TextBox 2" descr="Footer: BADM 225 · Chapter 1"/>
-          <p:cNvSpPr txBox="1"/>
-          <p:nvPr/>
-        </p:nvSpPr>
-        <p:spPr>
-          <a:xfrm>
-            <a:off x="502920" y="6446520"/>
-            <a:ext cx="5486400" cy="320040"/>
-          </a:xfrm>
-          <a:prstGeom prst="rect">
-            <a:avLst/>
-          </a:prstGeom>
-          <a:noFill/>
-        </p:spPr>
-        <p:txBody>
-          <a:bodyPr wrap="none">
-            <a:spAutoFit/>
-          </a:bodyPr>
-          <a:lstStyle/>
-          <a:p>
-            <a:r>
-              <a:rPr sz="1000">
-                <a:solidFill>
-                  <a:srgbClr val="5E6B64"/>
-                </a:solidFill>
-                <a:latin typeface="Calibri"/>
-              </a:rPr>
-              <a:t>BADM 225 · Chapter 1</a:t>
-            </a:r>
-          </a:p>
-        </p:txBody>
-      </p:sp>
-      <p:sp>
-        <p:nvSpPr>
-          <p:cNvPr id="4" name="TextBox 3" descr="Slide number 32"/>
-          <p:cNvSpPr txBox="1"/>
-          <p:nvPr/>
-        </p:nvSpPr>
-        <p:spPr>
-          <a:xfrm>
-            <a:off x="11247120" y="6446520"/>
-            <a:ext cx="640080" cy="320040"/>
-          </a:xfrm>
-          <a:prstGeom prst="rect">
-            <a:avLst/>
-          </a:prstGeom>
-          <a:noFill/>
-        </p:spPr>
-        <p:txBody>
-          <a:bodyPr wrap="none">
-            <a:spAutoFit/>
-          </a:bodyPr>
-          <a:lstStyle/>
-          <a:p>
-            <a:pPr algn="r"/>
-            <a:r>
-              <a:rPr sz="1000">
-                <a:solidFill>
-                  <a:srgbClr val="5E6B64"/>
-                </a:solidFill>
-                <a:latin typeface="Calibri"/>
-              </a:rPr>
-              <a:t>32</a:t>
-            </a:r>
-          </a:p>
-        </p:txBody>
-      </p:sp>
-      <p:sp>
-        <p:nvSpPr>
-          <p:cNvPr id="5" name="TextBox 4" descr="Key points"/>
-          <p:cNvSpPr txBox="1"/>
-          <p:nvPr/>
-        </p:nvSpPr>
-        <p:spPr>
-          <a:xfrm>
-            <a:off x="548640" y="1554480"/>
-            <a:ext cx="11064240" cy="4663440"/>
-          </a:xfrm>
-          <a:prstGeom prst="rect">
-            <a:avLst/>
-          </a:prstGeom>
-          <a:noFill/>
-        </p:spPr>
-        <p:txBody>
-          <a:bodyPr wrap="square">
-            <a:spAutoFit/>
-          </a:bodyPr>
-          <a:lstStyle/>
+                <a:latin typeface="Calibri"/>
+              </a:rPr>
+              <a:t>AI drafts fast.  </a:t>
+            </a:r>
+            <a:r>
+              <a:rPr sz="1700" b="0" i="0">
+                <a:solidFill>
+                  <a:srgbClr val="212A26"/>
+                </a:solidFill>
+                <a:latin typeface="Calibri"/>
+              </a:rPr>
+              <a:t>Modern AI tools produce competent first drafts of emails, summaries, and reports in seconds.</a:t>
+            </a:r>
+          </a:p>
           <a:p>
             <a:pPr algn="l">
               <a:spcAft>
@@ -16281,7 +16289,7 @@
             <a:r>
               <a:rPr sz="1700">
                 <a:solidFill>
-                  <a:srgbClr val="C9931A"/>
+                  <a:srgbClr val="8A6410"/>
                 </a:solidFill>
                 <a:latin typeface="Calibri"/>
               </a:rPr>
@@ -16294,7 +16302,7 @@
                 </a:solidFill>
                 <a:latin typeface="Calibri"/>
               </a:rPr>
-              <a:t>AI drafts fast.  </a:t>
+              <a:t>You still own the message.  </a:t>
             </a:r>
             <a:r>
               <a:rPr sz="1700" b="0" i="0">
@@ -16303,7 +16311,7 @@
                 </a:solidFill>
                 <a:latin typeface="Calibri"/>
               </a:rPr>
-              <a:t>Modern AI tools produce competent first drafts of emails, summaries, and reports in seconds.</a:t>
+              <a:t>AI doesn't know your reader, your history, or your intent — the judgment layer is yours.</a:t>
             </a:r>
           </a:p>
           <a:p>
@@ -16315,7 +16323,7 @@
             <a:r>
               <a:rPr sz="1700">
                 <a:solidFill>
-                  <a:srgbClr val="C9931A"/>
+                  <a:srgbClr val="8A6410"/>
                 </a:solidFill>
                 <a:latin typeface="Calibri"/>
               </a:rPr>
@@ -16328,7 +16336,7 @@
                 </a:solidFill>
                 <a:latin typeface="Calibri"/>
               </a:rPr>
-              <a:t>You still own the message.  </a:t>
+              <a:t>Verify before you trust.  </a:t>
             </a:r>
             <a:r>
               <a:rPr sz="1700" b="0" i="0">
@@ -16337,7 +16345,7 @@
                 </a:solidFill>
                 <a:latin typeface="Calibri"/>
               </a:rPr>
-              <a:t>AI doesn't know your reader, your history, or your intent — the judgment layer is yours.</a:t>
+              <a:t>AI states errors with confidence. Facts, numbers, names: check them.</a:t>
             </a:r>
           </a:p>
           <a:p>
@@ -16349,7 +16357,7 @@
             <a:r>
               <a:rPr sz="1700">
                 <a:solidFill>
-                  <a:srgbClr val="C9931A"/>
+                  <a:srgbClr val="8A6410"/>
                 </a:solidFill>
                 <a:latin typeface="Calibri"/>
               </a:rPr>
@@ -16362,7 +16370,7 @@
                 </a:solidFill>
                 <a:latin typeface="Calibri"/>
               </a:rPr>
-              <a:t>Verify before you trust.  </a:t>
+              <a:t>Disclose honestly.  </a:t>
             </a:r>
             <a:r>
               <a:rPr sz="1700" b="0" i="0">
@@ -16371,7 +16379,7 @@
                 </a:solidFill>
                 <a:latin typeface="Calibri"/>
               </a:rPr>
-              <a:t>AI states errors with confidence. Facts, numbers, names: check them.</a:t>
+              <a:t>Follow your instructor's and employer's rules for AI use and attribution.</a:t>
             </a:r>
           </a:p>
           <a:p>
@@ -16383,41 +16391,7 @@
             <a:r>
               <a:rPr sz="1700">
                 <a:solidFill>
-                  <a:srgbClr val="C9931A"/>
-                </a:solidFill>
-                <a:latin typeface="Calibri"/>
-              </a:rPr>
-              <a:t>▪  </a:t>
-            </a:r>
-            <a:r>
-              <a:rPr sz="1700" b="1">
-                <a:solidFill>
-                  <a:srgbClr val="0E4D33"/>
-                </a:solidFill>
-                <a:latin typeface="Calibri"/>
-              </a:rPr>
-              <a:t>Disclose honestly.  </a:t>
-            </a:r>
-            <a:r>
-              <a:rPr sz="1700" b="0" i="0">
-                <a:solidFill>
-                  <a:srgbClr val="212A26"/>
-                </a:solidFill>
-                <a:latin typeface="Calibri"/>
-              </a:rPr>
-              <a:t>Follow your instructor's and employer's rules for AI use and attribution.</a:t>
-            </a:r>
-          </a:p>
-          <a:p>
-            <a:pPr algn="l">
-              <a:spcAft>
-                <a:spcPts val="1200"/>
-              </a:spcAft>
-            </a:pPr>
-            <a:r>
-              <a:rPr sz="1700">
-                <a:solidFill>
-                  <a:srgbClr val="C9931A"/>
+                  <a:srgbClr val="8A6410"/>
                 </a:solidFill>
                 <a:latin typeface="Calibri"/>
               </a:rPr>
@@ -16472,26 +16446,25 @@
       <p:grpSpPr/>
       <p:sp>
         <p:nvSpPr>
-          <p:cNvPr id="2" name="TextBox 1" descr="Slide title: Key takeaways"/>
-          <p:cNvSpPr txBox="1"/>
-          <p:nvPr/>
+          <p:cNvPr id="2" name="Title 1" descr="Slide title: Key takeaways"/>
+          <p:cNvSpPr>
+            <a:spLocks noGrp="1"/>
+          </p:cNvSpPr>
+          <p:nvPr>
+            <p:ph type="title"/>
+          </p:nvPr>
         </p:nvSpPr>
         <p:spPr>
           <a:xfrm>
             <a:off x="502920" y="411480"/>
             <a:ext cx="11155680" cy="914400"/>
           </a:xfrm>
-          <a:prstGeom prst="rect">
-            <a:avLst/>
-          </a:prstGeom>
-          <a:noFill/>
-        </p:spPr>
-        <p:txBody>
-          <a:bodyPr wrap="square">
-            <a:spAutoFit/>
-          </a:bodyPr>
-          <a:lstStyle/>
-          <a:p>
+        </p:spPr>
+        <p:txBody>
+          <a:bodyPr wrap="square"/>
+          <a:lstStyle/>
+          <a:p>
+            <a:pPr algn="l"/>
             <a:r>
               <a:rPr sz="3200" b="1">
                 <a:solidFill>
@@ -17210,26 +17183,25 @@
       <p:grpSpPr/>
       <p:sp>
         <p:nvSpPr>
-          <p:cNvPr id="2" name="TextBox 1" descr="Slide title: Worth keeping"/>
-          <p:cNvSpPr txBox="1"/>
-          <p:nvPr/>
+          <p:cNvPr id="2" name="Title 1" descr="Slide title: Worth keeping"/>
+          <p:cNvSpPr>
+            <a:spLocks noGrp="1"/>
+          </p:cNvSpPr>
+          <p:nvPr>
+            <p:ph type="title"/>
+          </p:nvPr>
         </p:nvSpPr>
         <p:spPr>
           <a:xfrm>
             <a:off x="502920" y="411480"/>
             <a:ext cx="11155680" cy="914400"/>
           </a:xfrm>
-          <a:prstGeom prst="rect">
-            <a:avLst/>
-          </a:prstGeom>
-          <a:noFill/>
-        </p:spPr>
-        <p:txBody>
-          <a:bodyPr wrap="square">
-            <a:spAutoFit/>
-          </a:bodyPr>
-          <a:lstStyle/>
-          <a:p>
+        </p:spPr>
+        <p:txBody>
+          <a:bodyPr wrap="square"/>
+          <a:lstStyle/>
+          <a:p>
+            <a:pPr algn="l"/>
             <a:r>
               <a:rPr sz="3400" b="1">
                 <a:solidFill>
@@ -17417,26 +17389,25 @@
       <p:grpSpPr/>
       <p:sp>
         <p:nvSpPr>
-          <p:cNvPr id="2" name="TextBox 1" descr="Slide title: Discussion questions"/>
-          <p:cNvSpPr txBox="1"/>
-          <p:nvPr/>
+          <p:cNvPr id="2" name="Title 1" descr="Slide title: Discussion questions"/>
+          <p:cNvSpPr>
+            <a:spLocks noGrp="1"/>
+          </p:cNvSpPr>
+          <p:nvPr>
+            <p:ph type="title"/>
+          </p:nvPr>
         </p:nvSpPr>
         <p:spPr>
           <a:xfrm>
             <a:off x="502920" y="411480"/>
             <a:ext cx="11155680" cy="914400"/>
           </a:xfrm>
-          <a:prstGeom prst="rect">
-            <a:avLst/>
-          </a:prstGeom>
-          <a:noFill/>
-        </p:spPr>
-        <p:txBody>
-          <a:bodyPr wrap="square">
-            <a:spAutoFit/>
-          </a:bodyPr>
-          <a:lstStyle/>
-          <a:p>
+        </p:spPr>
+        <p:txBody>
+          <a:bodyPr wrap="square"/>
+          <a:lstStyle/>
+          <a:p>
+            <a:pPr algn="l"/>
             <a:r>
               <a:rPr sz="3400" b="1">
                 <a:solidFill>
@@ -17659,14 +17630,116 @@
       <p:grpSpPr/>
       <p:sp>
         <p:nvSpPr>
-          <p:cNvPr id="2" name="TextBox 1" descr="Slide title: Your next steps"/>
-          <p:cNvSpPr txBox="1"/>
-          <p:nvPr/>
+          <p:cNvPr id="2" name="Title 1" descr="Slide title: Your next steps"/>
+          <p:cNvSpPr>
+            <a:spLocks noGrp="1"/>
+          </p:cNvSpPr>
+          <p:nvPr>
+            <p:ph type="title"/>
+          </p:nvPr>
         </p:nvSpPr>
         <p:spPr>
           <a:xfrm>
             <a:off x="502920" y="411480"/>
             <a:ext cx="11155680" cy="914400"/>
+          </a:xfrm>
+        </p:spPr>
+        <p:txBody>
+          <a:bodyPr wrap="square"/>
+          <a:lstStyle/>
+          <a:p>
+            <a:pPr algn="l"/>
+            <a:r>
+              <a:rPr sz="3200" b="1">
+                <a:solidFill>
+                  <a:srgbClr val="0E4D33"/>
+                </a:solidFill>
+                <a:latin typeface="Cambria"/>
+              </a:rPr>
+              <a:t>Your next steps</a:t>
+            </a:r>
+          </a:p>
+        </p:txBody>
+      </p:sp>
+      <p:sp>
+        <p:nvSpPr>
+          <p:cNvPr id="3" name="TextBox 2" descr="Footer: BADM 225 · Chapter 1"/>
+          <p:cNvSpPr txBox="1"/>
+          <p:nvPr/>
+        </p:nvSpPr>
+        <p:spPr>
+          <a:xfrm>
+            <a:off x="502920" y="6446520"/>
+            <a:ext cx="5486400" cy="320040"/>
+          </a:xfrm>
+          <a:prstGeom prst="rect">
+            <a:avLst/>
+          </a:prstGeom>
+          <a:noFill/>
+        </p:spPr>
+        <p:txBody>
+          <a:bodyPr wrap="none">
+            <a:spAutoFit/>
+          </a:bodyPr>
+          <a:lstStyle/>
+          <a:p>
+            <a:r>
+              <a:rPr sz="1000">
+                <a:solidFill>
+                  <a:srgbClr val="5E6B64"/>
+                </a:solidFill>
+                <a:latin typeface="Calibri"/>
+              </a:rPr>
+              <a:t>BADM 225 · Chapter 1</a:t>
+            </a:r>
+          </a:p>
+        </p:txBody>
+      </p:sp>
+      <p:sp>
+        <p:nvSpPr>
+          <p:cNvPr id="4" name="TextBox 3" descr="Slide number 36"/>
+          <p:cNvSpPr txBox="1"/>
+          <p:nvPr/>
+        </p:nvSpPr>
+        <p:spPr>
+          <a:xfrm>
+            <a:off x="11247120" y="6446520"/>
+            <a:ext cx="640080" cy="320040"/>
+          </a:xfrm>
+          <a:prstGeom prst="rect">
+            <a:avLst/>
+          </a:prstGeom>
+          <a:noFill/>
+        </p:spPr>
+        <p:txBody>
+          <a:bodyPr wrap="none">
+            <a:spAutoFit/>
+          </a:bodyPr>
+          <a:lstStyle/>
+          <a:p>
+            <a:pPr algn="r"/>
+            <a:r>
+              <a:rPr sz="1000">
+                <a:solidFill>
+                  <a:srgbClr val="5E6B64"/>
+                </a:solidFill>
+                <a:latin typeface="Calibri"/>
+              </a:rPr>
+              <a:t>36</a:t>
+            </a:r>
+          </a:p>
+        </p:txBody>
+      </p:sp>
+      <p:sp>
+        <p:nvSpPr>
+          <p:cNvPr id="5" name="TextBox 4" descr="Key points"/>
+          <p:cNvSpPr txBox="1"/>
+          <p:nvPr/>
+        </p:nvSpPr>
+        <p:spPr>
+          <a:xfrm>
+            <a:off x="548640" y="1554480"/>
+            <a:ext cx="11064240" cy="4663440"/>
           </a:xfrm>
           <a:prstGeom prst="rect">
             <a:avLst/>
@@ -17679,108 +17752,39 @@
           </a:bodyPr>
           <a:lstStyle/>
           <a:p>
-            <a:r>
-              <a:rPr sz="3200" b="1">
+            <a:pPr algn="l">
+              <a:spcAft>
+                <a:spcPts val="1200"/>
+              </a:spcAft>
+            </a:pPr>
+            <a:r>
+              <a:rPr sz="1700">
+                <a:solidFill>
+                  <a:srgbClr val="8A6410"/>
+                </a:solidFill>
+                <a:latin typeface="Calibri"/>
+              </a:rPr>
+              <a:t>▪  </a:t>
+            </a:r>
+            <a:r>
+              <a:rPr sz="1700" b="1">
                 <a:solidFill>
                   <a:srgbClr val="0E4D33"/>
                 </a:solidFill>
-                <a:latin typeface="Cambria"/>
-              </a:rPr>
-              <a:t>Your next steps</a:t>
-            </a:r>
-          </a:p>
-        </p:txBody>
-      </p:sp>
-      <p:sp>
-        <p:nvSpPr>
-          <p:cNvPr id="3" name="TextBox 2" descr="Footer: BADM 225 · Chapter 1"/>
-          <p:cNvSpPr txBox="1"/>
-          <p:nvPr/>
-        </p:nvSpPr>
-        <p:spPr>
-          <a:xfrm>
-            <a:off x="502920" y="6446520"/>
-            <a:ext cx="5486400" cy="320040"/>
-          </a:xfrm>
-          <a:prstGeom prst="rect">
-            <a:avLst/>
-          </a:prstGeom>
-          <a:noFill/>
-        </p:spPr>
-        <p:txBody>
-          <a:bodyPr wrap="none">
-            <a:spAutoFit/>
-          </a:bodyPr>
-          <a:lstStyle/>
-          <a:p>
-            <a:r>
-              <a:rPr sz="1000">
-                <a:solidFill>
-                  <a:srgbClr val="5E6B64"/>
-                </a:solidFill>
-                <a:latin typeface="Calibri"/>
-              </a:rPr>
-              <a:t>BADM 225 · Chapter 1</a:t>
-            </a:r>
-          </a:p>
-        </p:txBody>
-      </p:sp>
-      <p:sp>
-        <p:nvSpPr>
-          <p:cNvPr id="4" name="TextBox 3" descr="Slide number 36"/>
-          <p:cNvSpPr txBox="1"/>
-          <p:nvPr/>
-        </p:nvSpPr>
-        <p:spPr>
-          <a:xfrm>
-            <a:off x="11247120" y="6446520"/>
-            <a:ext cx="640080" cy="320040"/>
-          </a:xfrm>
-          <a:prstGeom prst="rect">
-            <a:avLst/>
-          </a:prstGeom>
-          <a:noFill/>
-        </p:spPr>
-        <p:txBody>
-          <a:bodyPr wrap="none">
-            <a:spAutoFit/>
-          </a:bodyPr>
-          <a:lstStyle/>
-          <a:p>
-            <a:pPr algn="r"/>
-            <a:r>
-              <a:rPr sz="1000">
-                <a:solidFill>
-                  <a:srgbClr val="5E6B64"/>
-                </a:solidFill>
-                <a:latin typeface="Calibri"/>
-              </a:rPr>
-              <a:t>36</a:t>
-            </a:r>
-          </a:p>
-        </p:txBody>
-      </p:sp>
-      <p:sp>
-        <p:nvSpPr>
-          <p:cNvPr id="5" name="TextBox 4" descr="Key points"/>
-          <p:cNvSpPr txBox="1"/>
-          <p:nvPr/>
-        </p:nvSpPr>
-        <p:spPr>
-          <a:xfrm>
-            <a:off x="548640" y="1554480"/>
-            <a:ext cx="11064240" cy="4663440"/>
-          </a:xfrm>
-          <a:prstGeom prst="rect">
-            <a:avLst/>
-          </a:prstGeom>
-          <a:noFill/>
-        </p:spPr>
-        <p:txBody>
-          <a:bodyPr wrap="square">
-            <a:spAutoFit/>
-          </a:bodyPr>
-          <a:lstStyle/>
+                <a:latin typeface="Calibri"/>
+              </a:rPr>
+              <a:t>Practice:  </a:t>
+            </a:r>
+            <a:r>
+              <a:rPr sz="1700" b="0" i="0">
+                <a:solidFill>
+                  <a:srgbClr val="212A26"/>
+                </a:solidFill>
+                <a:latin typeface="Calibri"/>
+              </a:rPr>
+              <a:t>Course site → Chapter 1 → Practice questions (instant feedback, unlimited tries).</a:t>
+            </a:r>
+          </a:p>
           <a:p>
             <a:pPr algn="l">
               <a:spcAft>
@@ -17790,7 +17794,7 @@
             <a:r>
               <a:rPr sz="1700">
                 <a:solidFill>
-                  <a:srgbClr val="C9931A"/>
+                  <a:srgbClr val="8A6410"/>
                 </a:solidFill>
                 <a:latin typeface="Calibri"/>
               </a:rPr>
@@ -17803,7 +17807,7 @@
                 </a:solidFill>
                 <a:latin typeface="Calibri"/>
               </a:rPr>
-              <a:t>Practice:  </a:t>
+              <a:t>Graded:  </a:t>
             </a:r>
             <a:r>
               <a:rPr sz="1700" b="0" i="0">
@@ -17812,7 +17816,7 @@
                 </a:solidFill>
                 <a:latin typeface="Calibri"/>
               </a:rPr>
-              <a:t>Course site → Chapter 1 → Practice questions (instant feedback, unlimited tries).</a:t>
+              <a:t>Complete the Chapter 1 homework on the site; paste your completion code into the Blackboard assignment before the weekly deadline.</a:t>
             </a:r>
           </a:p>
           <a:p>
@@ -17824,7 +17828,7 @@
             <a:r>
               <a:rPr sz="1700">
                 <a:solidFill>
-                  <a:srgbClr val="C9931A"/>
+                  <a:srgbClr val="8A6410"/>
                 </a:solidFill>
                 <a:latin typeface="Calibri"/>
               </a:rPr>
@@ -17837,7 +17841,7 @@
                 </a:solidFill>
                 <a:latin typeface="Calibri"/>
               </a:rPr>
-              <a:t>Graded:  </a:t>
+              <a:t>Write:  </a:t>
             </a:r>
             <a:r>
               <a:rPr sz="1700" b="0" i="0">
@@ -17846,7 +17850,7 @@
                 </a:solidFill>
                 <a:latin typeface="Calibri"/>
               </a:rPr>
-              <a:t>Complete the Chapter 1 homework on the site; paste your completion code into the Blackboard assignment before the weekly deadline.</a:t>
+              <a:t>Try one Chapter 1 writing prompt and self-check it against the model guidance.</a:t>
             </a:r>
           </a:p>
           <a:p>
@@ -17858,7 +17862,7 @@
             <a:r>
               <a:rPr sz="1700">
                 <a:solidFill>
-                  <a:srgbClr val="C9931A"/>
+                  <a:srgbClr val="8A6410"/>
                 </a:solidFill>
                 <a:latin typeface="Calibri"/>
               </a:rPr>
@@ -17871,7 +17875,7 @@
                 </a:solidFill>
                 <a:latin typeface="Calibri"/>
               </a:rPr>
-              <a:t>Write:  </a:t>
+              <a:t>Reflect:  </a:t>
             </a:r>
             <a:r>
               <a:rPr sz="1700" b="0" i="0">
@@ -17880,7 +17884,7 @@
                 </a:solidFill>
                 <a:latin typeface="Calibri"/>
               </a:rPr>
-              <a:t>Try one Chapter 1 writing prompt and self-check it against the model guidance.</a:t>
+              <a:t>Watch one speaker you admire this week — list two nonverbal habits worth stealing.</a:t>
             </a:r>
           </a:p>
           <a:p>
@@ -17892,41 +17896,7 @@
             <a:r>
               <a:rPr sz="1700">
                 <a:solidFill>
-                  <a:srgbClr val="C9931A"/>
-                </a:solidFill>
-                <a:latin typeface="Calibri"/>
-              </a:rPr>
-              <a:t>▪  </a:t>
-            </a:r>
-            <a:r>
-              <a:rPr sz="1700" b="1">
-                <a:solidFill>
-                  <a:srgbClr val="0E4D33"/>
-                </a:solidFill>
-                <a:latin typeface="Calibri"/>
-              </a:rPr>
-              <a:t>Reflect:  </a:t>
-            </a:r>
-            <a:r>
-              <a:rPr sz="1700" b="0" i="0">
-                <a:solidFill>
-                  <a:srgbClr val="212A26"/>
-                </a:solidFill>
-                <a:latin typeface="Calibri"/>
-              </a:rPr>
-              <a:t>Watch one speaker you admire this week — list two nonverbal habits worth stealing.</a:t>
-            </a:r>
-          </a:p>
-          <a:p>
-            <a:pPr algn="l">
-              <a:spcAft>
-                <a:spcPts val="1200"/>
-              </a:spcAft>
-            </a:pPr>
-            <a:r>
-              <a:rPr sz="1700">
-                <a:solidFill>
-                  <a:srgbClr val="C9931A"/>
+                  <a:srgbClr val="8A6410"/>
                 </a:solidFill>
                 <a:latin typeface="Calibri"/>
               </a:rPr>
@@ -17981,7 +17951,40 @@
       <p:grpSpPr/>
       <p:sp>
         <p:nvSpPr>
-          <p:cNvPr id="2" name="TextBox 1" descr="Section number 01"/>
+          <p:cNvPr id="2" name="Title 1" descr="Slide title: How communication actually works"/>
+          <p:cNvSpPr>
+            <a:spLocks noGrp="1"/>
+          </p:cNvSpPr>
+          <p:nvPr>
+            <p:ph type="title"/>
+          </p:nvPr>
+        </p:nvSpPr>
+        <p:spPr>
+          <a:xfrm>
+            <a:off x="822960" y="2834640"/>
+            <a:ext cx="10515600" cy="914400"/>
+          </a:xfrm>
+        </p:spPr>
+        <p:txBody>
+          <a:bodyPr wrap="square"/>
+          <a:lstStyle/>
+          <a:p>
+            <a:pPr algn="l"/>
+            <a:r>
+              <a:rPr sz="4000" b="1">
+                <a:solidFill>
+                  <a:srgbClr val="FFFFFF"/>
+                </a:solidFill>
+                <a:latin typeface="Cambria"/>
+              </a:rPr>
+              <a:t>How communication actually works</a:t>
+            </a:r>
+          </a:p>
+        </p:txBody>
+      </p:sp>
+      <p:sp>
+        <p:nvSpPr>
+          <p:cNvPr id="3" name="TextBox 2" descr="Section number 01"/>
           <p:cNvSpPr txBox="1"/>
           <p:nvPr/>
         </p:nvSpPr>
@@ -18014,40 +18017,6 @@
                 <a:latin typeface="Cambria"/>
               </a:rPr>
               <a:t>01</a:t>
-            </a:r>
-          </a:p>
-        </p:txBody>
-      </p:sp>
-      <p:sp>
-        <p:nvSpPr>
-          <p:cNvPr id="3" name="TextBox 2" descr="Slide title: How communication actually works"/>
-          <p:cNvSpPr txBox="1"/>
-          <p:nvPr/>
-        </p:nvSpPr>
-        <p:spPr>
-          <a:xfrm>
-            <a:off x="822960" y="2834640"/>
-            <a:ext cx="10515600" cy="914400"/>
-          </a:xfrm>
-          <a:prstGeom prst="rect">
-            <a:avLst/>
-          </a:prstGeom>
-          <a:noFill/>
-        </p:spPr>
-        <p:txBody>
-          <a:bodyPr wrap="square">
-            <a:spAutoFit/>
-          </a:bodyPr>
-          <a:lstStyle/>
-          <a:p>
-            <a:r>
-              <a:rPr sz="4000" b="1">
-                <a:solidFill>
-                  <a:srgbClr val="FFFFFF"/>
-                </a:solidFill>
-                <a:latin typeface="Cambria"/>
-              </a:rPr>
-              <a:t>How communication actually works</a:t>
             </a:r>
           </a:p>
         </p:txBody>
@@ -18188,26 +18157,25 @@
       <p:grpSpPr/>
       <p:sp>
         <p:nvSpPr>
-          <p:cNvPr id="2" name="TextBox 1" descr="Slide title: The communication process"/>
-          <p:cNvSpPr txBox="1"/>
-          <p:nvPr/>
+          <p:cNvPr id="2" name="Title 1" descr="Slide title: The communication process"/>
+          <p:cNvSpPr>
+            <a:spLocks noGrp="1"/>
+          </p:cNvSpPr>
+          <p:nvPr>
+            <p:ph type="title"/>
+          </p:nvPr>
         </p:nvSpPr>
         <p:spPr>
           <a:xfrm>
             <a:off x="502920" y="411480"/>
             <a:ext cx="11155680" cy="914400"/>
           </a:xfrm>
-          <a:prstGeom prst="rect">
-            <a:avLst/>
-          </a:prstGeom>
-          <a:noFill/>
-        </p:spPr>
-        <p:txBody>
-          <a:bodyPr wrap="square">
-            <a:spAutoFit/>
-          </a:bodyPr>
-          <a:lstStyle/>
-          <a:p>
+        </p:spPr>
+        <p:txBody>
+          <a:bodyPr wrap="square"/>
+          <a:lstStyle/>
+          <a:p>
+            <a:pPr algn="l"/>
             <a:r>
               <a:rPr sz="3200" b="1">
                 <a:solidFill>
@@ -18843,26 +18811,25 @@
       <p:grpSpPr/>
       <p:sp>
         <p:nvSpPr>
-          <p:cNvPr id="2" name="TextBox 1" descr="Slide title: Frame of reference: why the same memo reads two ways"/>
-          <p:cNvSpPr txBox="1"/>
-          <p:nvPr/>
+          <p:cNvPr id="2" name="Title 1" descr="Slide title: Frame of reference: why the same memo reads two ways"/>
+          <p:cNvSpPr>
+            <a:spLocks noGrp="1"/>
+          </p:cNvSpPr>
+          <p:nvPr>
+            <p:ph type="title"/>
+          </p:nvPr>
         </p:nvSpPr>
         <p:spPr>
           <a:xfrm>
             <a:off x="502920" y="411480"/>
             <a:ext cx="11155680" cy="914400"/>
           </a:xfrm>
-          <a:prstGeom prst="rect">
-            <a:avLst/>
-          </a:prstGeom>
-          <a:noFill/>
-        </p:spPr>
-        <p:txBody>
-          <a:bodyPr wrap="square">
-            <a:spAutoFit/>
-          </a:bodyPr>
-          <a:lstStyle/>
-          <a:p>
+        </p:spPr>
+        <p:txBody>
+          <a:bodyPr wrap="square"/>
+          <a:lstStyle/>
+          <a:p>
+            <a:pPr algn="l"/>
             <a:r>
               <a:rPr sz="3200" b="1">
                 <a:solidFill>
@@ -19008,7 +18975,7 @@
             <a:r>
               <a:rPr sz="1500">
                 <a:solidFill>
-                  <a:srgbClr val="C9931A"/>
+                  <a:srgbClr val="8A6410"/>
                 </a:solidFill>
                 <a:latin typeface="Calibri"/>
               </a:rPr>
@@ -19033,7 +19000,7 @@
             <a:r>
               <a:rPr sz="1500">
                 <a:solidFill>
-                  <a:srgbClr val="C9931A"/>
+                  <a:srgbClr val="8A6410"/>
                 </a:solidFill>
                 <a:latin typeface="Calibri"/>
               </a:rPr>
@@ -19058,7 +19025,7 @@
             <a:r>
               <a:rPr sz="1500">
                 <a:solidFill>
-                  <a:srgbClr val="C9931A"/>
+                  <a:srgbClr val="8A6410"/>
                 </a:solidFill>
                 <a:latin typeface="Calibri"/>
               </a:rPr>
@@ -19083,7 +19050,7 @@
             <a:r>
               <a:rPr sz="1500">
                 <a:solidFill>
-                  <a:srgbClr val="C9931A"/>
+                  <a:srgbClr val="8A6410"/>
                 </a:solidFill>
                 <a:latin typeface="Calibri"/>
               </a:rPr>
@@ -19165,7 +19132,7 @@
             <a:r>
               <a:rPr sz="1500">
                 <a:solidFill>
-                  <a:srgbClr val="C9931A"/>
+                  <a:srgbClr val="8A6410"/>
                 </a:solidFill>
                 <a:latin typeface="Calibri"/>
               </a:rPr>
@@ -19199,7 +19166,7 @@
             <a:r>
               <a:rPr sz="1500">
                 <a:solidFill>
-                  <a:srgbClr val="C9931A"/>
+                  <a:srgbClr val="8A6410"/>
                 </a:solidFill>
                 <a:latin typeface="Calibri"/>
               </a:rPr>
@@ -19233,7 +19200,7 @@
             <a:r>
               <a:rPr sz="1500">
                 <a:solidFill>
-                  <a:srgbClr val="C9931A"/>
+                  <a:srgbClr val="8A6410"/>
                 </a:solidFill>
                 <a:latin typeface="Calibri"/>
               </a:rPr>
@@ -19267,7 +19234,7 @@
             <a:r>
               <a:rPr sz="1500">
                 <a:solidFill>
-                  <a:srgbClr val="C9931A"/>
+                  <a:srgbClr val="8A6410"/>
                 </a:solidFill>
                 <a:latin typeface="Calibri"/>
               </a:rPr>
@@ -19322,26 +19289,25 @@
       <p:grpSpPr/>
       <p:sp>
         <p:nvSpPr>
-          <p:cNvPr id="2" name="TextBox 1" descr="Slide title: Noise: everything that degrades the message"/>
-          <p:cNvSpPr txBox="1"/>
-          <p:nvPr/>
+          <p:cNvPr id="2" name="Title 1" descr="Slide title: Noise: everything that degrades the message"/>
+          <p:cNvSpPr>
+            <a:spLocks noGrp="1"/>
+          </p:cNvSpPr>
+          <p:nvPr>
+            <p:ph type="title"/>
+          </p:nvPr>
         </p:nvSpPr>
         <p:spPr>
           <a:xfrm>
             <a:off x="502920" y="411480"/>
             <a:ext cx="11155680" cy="914400"/>
           </a:xfrm>
-          <a:prstGeom prst="rect">
-            <a:avLst/>
-          </a:prstGeom>
-          <a:noFill/>
-        </p:spPr>
-        <p:txBody>
-          <a:bodyPr wrap="square">
-            <a:spAutoFit/>
-          </a:bodyPr>
-          <a:lstStyle/>
-          <a:p>
+        </p:spPr>
+        <p:txBody>
+          <a:bodyPr wrap="square"/>
+          <a:lstStyle/>
+          <a:p>
+            <a:pPr algn="l"/>
             <a:r>
               <a:rPr sz="3200" b="1">
                 <a:solidFill>
@@ -19814,14 +19780,116 @@
       <p:grpSpPr/>
       <p:sp>
         <p:nvSpPr>
-          <p:cNvPr id="2" name="TextBox 1" descr="Slide title: Case: the safety memo nobody followed"/>
-          <p:cNvSpPr txBox="1"/>
-          <p:nvPr/>
+          <p:cNvPr id="2" name="Title 1" descr="Slide title: Case: the safety memo nobody followed"/>
+          <p:cNvSpPr>
+            <a:spLocks noGrp="1"/>
+          </p:cNvSpPr>
+          <p:nvPr>
+            <p:ph type="title"/>
+          </p:nvPr>
         </p:nvSpPr>
         <p:spPr>
           <a:xfrm>
             <a:off x="502920" y="411480"/>
             <a:ext cx="11155680" cy="914400"/>
+          </a:xfrm>
+        </p:spPr>
+        <p:txBody>
+          <a:bodyPr wrap="square"/>
+          <a:lstStyle/>
+          <a:p>
+            <a:pPr algn="l"/>
+            <a:r>
+              <a:rPr sz="3200" b="1">
+                <a:solidFill>
+                  <a:srgbClr val="0E4D33"/>
+                </a:solidFill>
+                <a:latin typeface="Cambria"/>
+              </a:rPr>
+              <a:t>Case: the safety memo nobody followed</a:t>
+            </a:r>
+          </a:p>
+        </p:txBody>
+      </p:sp>
+      <p:sp>
+        <p:nvSpPr>
+          <p:cNvPr id="3" name="TextBox 2" descr="Footer: BADM 225 · Chapter 1"/>
+          <p:cNvSpPr txBox="1"/>
+          <p:nvPr/>
+        </p:nvSpPr>
+        <p:spPr>
+          <a:xfrm>
+            <a:off x="502920" y="6446520"/>
+            <a:ext cx="5486400" cy="320040"/>
+          </a:xfrm>
+          <a:prstGeom prst="rect">
+            <a:avLst/>
+          </a:prstGeom>
+          <a:noFill/>
+        </p:spPr>
+        <p:txBody>
+          <a:bodyPr wrap="none">
+            <a:spAutoFit/>
+          </a:bodyPr>
+          <a:lstStyle/>
+          <a:p>
+            <a:r>
+              <a:rPr sz="1000">
+                <a:solidFill>
+                  <a:srgbClr val="5E6B64"/>
+                </a:solidFill>
+                <a:latin typeface="Calibri"/>
+              </a:rPr>
+              <a:t>BADM 225 · Chapter 1</a:t>
+            </a:r>
+          </a:p>
+        </p:txBody>
+      </p:sp>
+      <p:sp>
+        <p:nvSpPr>
+          <p:cNvPr id="4" name="TextBox 3" descr="Slide number 8"/>
+          <p:cNvSpPr txBox="1"/>
+          <p:nvPr/>
+        </p:nvSpPr>
+        <p:spPr>
+          <a:xfrm>
+            <a:off x="11247120" y="6446520"/>
+            <a:ext cx="640080" cy="320040"/>
+          </a:xfrm>
+          <a:prstGeom prst="rect">
+            <a:avLst/>
+          </a:prstGeom>
+          <a:noFill/>
+        </p:spPr>
+        <p:txBody>
+          <a:bodyPr wrap="none">
+            <a:spAutoFit/>
+          </a:bodyPr>
+          <a:lstStyle/>
+          <a:p>
+            <a:pPr algn="r"/>
+            <a:r>
+              <a:rPr sz="1000">
+                <a:solidFill>
+                  <a:srgbClr val="5E6B64"/>
+                </a:solidFill>
+                <a:latin typeface="Calibri"/>
+              </a:rPr>
+              <a:t>8</a:t>
+            </a:r>
+          </a:p>
+        </p:txBody>
+      </p:sp>
+      <p:sp>
+        <p:nvSpPr>
+          <p:cNvPr id="5" name="TextBox 4" descr="Key points"/>
+          <p:cNvSpPr txBox="1"/>
+          <p:nvPr/>
+        </p:nvSpPr>
+        <p:spPr>
+          <a:xfrm>
+            <a:off x="548640" y="1554480"/>
+            <a:ext cx="11064240" cy="4663440"/>
           </a:xfrm>
           <a:prstGeom prst="rect">
             <a:avLst/>
@@ -19834,108 +19902,39 @@
           </a:bodyPr>
           <a:lstStyle/>
           <a:p>
-            <a:r>
-              <a:rPr sz="3200" b="1">
+            <a:pPr algn="l">
+              <a:spcAft>
+                <a:spcPts val="1200"/>
+              </a:spcAft>
+            </a:pPr>
+            <a:r>
+              <a:rPr sz="1700">
+                <a:solidFill>
+                  <a:srgbClr val="8A6410"/>
+                </a:solidFill>
+                <a:latin typeface="Calibri"/>
+              </a:rPr>
+              <a:t>▪  </a:t>
+            </a:r>
+            <a:r>
+              <a:rPr sz="1700" b="1">
                 <a:solidFill>
                   <a:srgbClr val="0E4D33"/>
                 </a:solidFill>
-                <a:latin typeface="Cambria"/>
-              </a:rPr>
-              <a:t>Case: the safety memo nobody followed</a:t>
-            </a:r>
-          </a:p>
-        </p:txBody>
-      </p:sp>
-      <p:sp>
-        <p:nvSpPr>
-          <p:cNvPr id="3" name="TextBox 2" descr="Footer: BADM 225 · Chapter 1"/>
-          <p:cNvSpPr txBox="1"/>
-          <p:nvPr/>
-        </p:nvSpPr>
-        <p:spPr>
-          <a:xfrm>
-            <a:off x="502920" y="6446520"/>
-            <a:ext cx="5486400" cy="320040"/>
-          </a:xfrm>
-          <a:prstGeom prst="rect">
-            <a:avLst/>
-          </a:prstGeom>
-          <a:noFill/>
-        </p:spPr>
-        <p:txBody>
-          <a:bodyPr wrap="none">
-            <a:spAutoFit/>
-          </a:bodyPr>
-          <a:lstStyle/>
-          <a:p>
-            <a:r>
-              <a:rPr sz="1000">
-                <a:solidFill>
-                  <a:srgbClr val="5E6B64"/>
-                </a:solidFill>
-                <a:latin typeface="Calibri"/>
-              </a:rPr>
-              <a:t>BADM 225 · Chapter 1</a:t>
-            </a:r>
-          </a:p>
-        </p:txBody>
-      </p:sp>
-      <p:sp>
-        <p:nvSpPr>
-          <p:cNvPr id="4" name="TextBox 3" descr="Slide number 8"/>
-          <p:cNvSpPr txBox="1"/>
-          <p:nvPr/>
-        </p:nvSpPr>
-        <p:spPr>
-          <a:xfrm>
-            <a:off x="11247120" y="6446520"/>
-            <a:ext cx="640080" cy="320040"/>
-          </a:xfrm>
-          <a:prstGeom prst="rect">
-            <a:avLst/>
-          </a:prstGeom>
-          <a:noFill/>
-        </p:spPr>
-        <p:txBody>
-          <a:bodyPr wrap="none">
-            <a:spAutoFit/>
-          </a:bodyPr>
-          <a:lstStyle/>
-          <a:p>
-            <a:pPr algn="r"/>
-            <a:r>
-              <a:rPr sz="1000">
-                <a:solidFill>
-                  <a:srgbClr val="5E6B64"/>
-                </a:solidFill>
-                <a:latin typeface="Calibri"/>
-              </a:rPr>
-              <a:t>8</a:t>
-            </a:r>
-          </a:p>
-        </p:txBody>
-      </p:sp>
-      <p:sp>
-        <p:nvSpPr>
-          <p:cNvPr id="5" name="TextBox 4" descr="Key points"/>
-          <p:cNvSpPr txBox="1"/>
-          <p:nvPr/>
-        </p:nvSpPr>
-        <p:spPr>
-          <a:xfrm>
-            <a:off x="548640" y="1554480"/>
-            <a:ext cx="11064240" cy="4663440"/>
-          </a:xfrm>
-          <a:prstGeom prst="rect">
-            <a:avLst/>
-          </a:prstGeom>
-          <a:noFill/>
-        </p:spPr>
-        <p:txBody>
-          <a:bodyPr wrap="square">
-            <a:spAutoFit/>
-          </a:bodyPr>
-          <a:lstStyle/>
+                <a:latin typeface="Calibri"/>
+              </a:rPr>
+              <a:t>The situation:  </a:t>
+            </a:r>
+            <a:r>
+              <a:rPr sz="1700" b="0" i="0">
+                <a:solidFill>
+                  <a:srgbClr val="212A26"/>
+                </a:solidFill>
+                <a:latin typeface="Calibri"/>
+              </a:rPr>
+              <a:t>A safety engineer emails dense technical instructions to office staff. A week later, compliance is near zero.</a:t>
+            </a:r>
+          </a:p>
           <a:p>
             <a:pPr algn="l">
               <a:spcAft>
@@ -19945,7 +19944,7 @@
             <a:r>
               <a:rPr sz="1700">
                 <a:solidFill>
-                  <a:srgbClr val="C9931A"/>
+                  <a:srgbClr val="8A6410"/>
                 </a:solidFill>
                 <a:latin typeface="Calibri"/>
               </a:rPr>
@@ -19958,7 +19957,7 @@
                 </a:solidFill>
                 <a:latin typeface="Calibri"/>
               </a:rPr>
-              <a:t>The situation:  </a:t>
+              <a:t>Encoding failure —  </a:t>
             </a:r>
             <a:r>
               <a:rPr sz="1700" b="0" i="0">
@@ -19967,7 +19966,7 @@
                 </a:solidFill>
                 <a:latin typeface="Calibri"/>
               </a:rPr>
-              <a:t>A safety engineer emails dense technical instructions to office staff. A week later, compliance is near zero.</a:t>
+              <a:t>the memo used specialist vocabulary the audience could not decode (semantic noise).</a:t>
             </a:r>
           </a:p>
           <a:p>
@@ -19979,7 +19978,7 @@
             <a:r>
               <a:rPr sz="1700">
                 <a:solidFill>
-                  <a:srgbClr val="C9931A"/>
+                  <a:srgbClr val="8A6410"/>
                 </a:solidFill>
                 <a:latin typeface="Calibri"/>
               </a:rPr>
@@ -19992,7 +19991,7 @@
                 </a:solidFill>
                 <a:latin typeface="Calibri"/>
               </a:rPr>
-              <a:t>Encoding failure —  </a:t>
+              <a:t>Channel failure —  </a:t>
             </a:r>
             <a:r>
               <a:rPr sz="1700" b="0" i="0">
@@ -20001,7 +20000,7 @@
                 </a:solidFill>
                 <a:latin typeface="Calibri"/>
               </a:rPr>
-              <a:t>the memo used specialist vocabulary the audience could not decode (semantic noise).</a:t>
+              <a:t>one mass email for a behavior change that needed discussion and demonstration.</a:t>
             </a:r>
           </a:p>
           <a:p>
@@ -20013,7 +20012,7 @@
             <a:r>
               <a:rPr sz="1700">
                 <a:solidFill>
-                  <a:srgbClr val="C9931A"/>
+                  <a:srgbClr val="8A6410"/>
                 </a:solidFill>
                 <a:latin typeface="Calibri"/>
               </a:rPr>
@@ -20026,7 +20025,7 @@
                 </a:solidFill>
                 <a:latin typeface="Calibri"/>
               </a:rPr>
-              <a:t>Channel failure —  </a:t>
+              <a:t>Feedback failure —  </a:t>
             </a:r>
             <a:r>
               <a:rPr sz="1700" b="0" i="0">
@@ -20035,7 +20034,7 @@
                 </a:solidFill>
                 <a:latin typeface="Calibri"/>
               </a:rPr>
-              <a:t>one mass email for a behavior change that needed discussion and demonstration.</a:t>
+              <a:t>no confirmation loop, so the sender learned about the breakdown a week late.</a:t>
             </a:r>
           </a:p>
           <a:p>
@@ -20047,41 +20046,7 @@
             <a:r>
               <a:rPr sz="1700">
                 <a:solidFill>
-                  <a:srgbClr val="C9931A"/>
-                </a:solidFill>
-                <a:latin typeface="Calibri"/>
-              </a:rPr>
-              <a:t>▪  </a:t>
-            </a:r>
-            <a:r>
-              <a:rPr sz="1700" b="1">
-                <a:solidFill>
-                  <a:srgbClr val="0E4D33"/>
-                </a:solidFill>
-                <a:latin typeface="Calibri"/>
-              </a:rPr>
-              <a:t>Feedback failure —  </a:t>
-            </a:r>
-            <a:r>
-              <a:rPr sz="1700" b="0" i="0">
-                <a:solidFill>
-                  <a:srgbClr val="212A26"/>
-                </a:solidFill>
-                <a:latin typeface="Calibri"/>
-              </a:rPr>
-              <a:t>no confirmation loop, so the sender learned about the breakdown a week late.</a:t>
-            </a:r>
-          </a:p>
-          <a:p>
-            <a:pPr algn="l">
-              <a:spcAft>
-                <a:spcPts val="1200"/>
-              </a:spcAft>
-            </a:pPr>
-            <a:r>
-              <a:rPr sz="1700">
-                <a:solidFill>
-                  <a:srgbClr val="C9931A"/>
+                  <a:srgbClr val="8A6410"/>
                 </a:solidFill>
                 <a:latin typeface="Calibri"/>
               </a:rPr>
@@ -20136,7 +20101,40 @@
       <p:grpSpPr/>
       <p:sp>
         <p:nvSpPr>
-          <p:cNvPr id="2" name="TextBox 1" descr="Section number 02"/>
+          <p:cNvPr id="2" name="Title 1" descr="Slide title: Choosing the channel"/>
+          <p:cNvSpPr>
+            <a:spLocks noGrp="1"/>
+          </p:cNvSpPr>
+          <p:nvPr>
+            <p:ph type="title"/>
+          </p:nvPr>
+        </p:nvSpPr>
+        <p:spPr>
+          <a:xfrm>
+            <a:off x="822960" y="2834640"/>
+            <a:ext cx="10515600" cy="914400"/>
+          </a:xfrm>
+        </p:spPr>
+        <p:txBody>
+          <a:bodyPr wrap="square"/>
+          <a:lstStyle/>
+          <a:p>
+            <a:pPr algn="l"/>
+            <a:r>
+              <a:rPr sz="4000" b="1">
+                <a:solidFill>
+                  <a:srgbClr val="FFFFFF"/>
+                </a:solidFill>
+                <a:latin typeface="Cambria"/>
+              </a:rPr>
+              <a:t>Choosing the channel</a:t>
+            </a:r>
+          </a:p>
+        </p:txBody>
+      </p:sp>
+      <p:sp>
+        <p:nvSpPr>
+          <p:cNvPr id="3" name="TextBox 2" descr="Section number 02"/>
           <p:cNvSpPr txBox="1"/>
           <p:nvPr/>
         </p:nvSpPr>
@@ -20169,40 +20167,6 @@
                 <a:latin typeface="Cambria"/>
               </a:rPr>
               <a:t>02</a:t>
-            </a:r>
-          </a:p>
-        </p:txBody>
-      </p:sp>
-      <p:sp>
-        <p:nvSpPr>
-          <p:cNvPr id="3" name="TextBox 2" descr="Slide title: Choosing the channel"/>
-          <p:cNvSpPr txBox="1"/>
-          <p:nvPr/>
-        </p:nvSpPr>
-        <p:spPr>
-          <a:xfrm>
-            <a:off x="822960" y="2834640"/>
-            <a:ext cx="10515600" cy="914400"/>
-          </a:xfrm>
-          <a:prstGeom prst="rect">
-            <a:avLst/>
-          </a:prstGeom>
-          <a:noFill/>
-        </p:spPr>
-        <p:txBody>
-          <a:bodyPr wrap="square">
-            <a:spAutoFit/>
-          </a:bodyPr>
-          <a:lstStyle/>
-          <a:p>
-            <a:r>
-              <a:rPr sz="4000" b="1">
-                <a:solidFill>
-                  <a:srgbClr val="FFFFFF"/>
-                </a:solidFill>
-                <a:latin typeface="Cambria"/>
-              </a:rPr>
-              <a:t>Choosing the channel</a:t>
             </a:r>
           </a:p>
         </p:txBody>

--- a/slides/ch01-communicating-in-todays-workplace.pptx
+++ b/slides/ch01-communicating-in-todays-workplace.pptx
@@ -6239,7 +6239,7 @@
                 </a:solidFill>
                 <a:latin typeface="Calibri"/>
               </a:rPr>
-              <a:t>BADM 225 · Chapter 1</a:t>
+              <a:t>BADM 225 · Chapter 1  ·  © Derek D. Bussan</a:t>
             </a:r>
           </a:p>
         </p:txBody>
@@ -6893,7 +6893,7 @@
                 </a:solidFill>
                 <a:latin typeface="Calibri"/>
               </a:rPr>
-              <a:t>BADM 225 · Chapter 1</a:t>
+              <a:t>BADM 225 · Chapter 1  ·  © Derek D. Bussan</a:t>
             </a:r>
           </a:p>
         </p:txBody>
@@ -7335,7 +7335,7 @@
                 </a:solidFill>
                 <a:latin typeface="Calibri"/>
               </a:rPr>
-              <a:t>BADM 225 · Chapter 1</a:t>
+              <a:t>BADM 225 · Chapter 1  ·  © Derek D. Bussan</a:t>
             </a:r>
           </a:p>
         </p:txBody>
@@ -7934,7 +7934,7 @@
                 </a:solidFill>
                 <a:latin typeface="Calibri"/>
               </a:rPr>
-              <a:t>BADM 225 · Chapter 1</a:t>
+              <a:t>BADM 225 · Chapter 1  ·  © Derek D. Bussan</a:t>
             </a:r>
           </a:p>
         </p:txBody>
@@ -8572,7 +8572,7 @@
                 </a:solidFill>
                 <a:latin typeface="Calibri"/>
               </a:rPr>
-              <a:t>BADM 225 · Chapter 1</a:t>
+              <a:t>BADM 225 · Chapter 1  ·  © Derek D. Bussan</a:t>
             </a:r>
           </a:p>
         </p:txBody>
@@ -8700,7 +8700,7 @@
                 </a:solidFill>
                 <a:latin typeface="Calibri"/>
               </a:rPr>
-              <a:t>BADM 225 · Chapter 1</a:t>
+              <a:t>BADM 225 · Chapter 1  ·  © Derek D. Bussan</a:t>
             </a:r>
           </a:p>
         </p:txBody>
@@ -8960,7 +8960,7 @@
                 </a:solidFill>
                 <a:latin typeface="Calibri"/>
               </a:rPr>
-              <a:t>BADM 225 · Chapter 1</a:t>
+              <a:t>BADM 225 · Chapter 1  ·  © Derek D. Bussan</a:t>
             </a:r>
           </a:p>
         </p:txBody>
@@ -9614,7 +9614,7 @@
                 </a:solidFill>
                 <a:latin typeface="Calibri"/>
               </a:rPr>
-              <a:t>BADM 225 · Chapter 1</a:t>
+              <a:t>BADM 225 · Chapter 1  ·  © Derek D. Bussan</a:t>
             </a:r>
           </a:p>
         </p:txBody>
@@ -10031,7 +10031,7 @@
                 </a:solidFill>
                 <a:latin typeface="Calibri"/>
               </a:rPr>
-              <a:t>BADM 225 · Chapter 1</a:t>
+              <a:t>BADM 225 · Chapter 1  ·  © Derek D. Bussan</a:t>
             </a:r>
           </a:p>
         </p:txBody>
@@ -10777,7 +10777,7 @@
                 </a:solidFill>
                 <a:latin typeface="Calibri"/>
               </a:rPr>
-              <a:t>BADM 225 · Chapter 1</a:t>
+              <a:t>BADM 225 · Chapter 1  ·  © Derek D. Bussan</a:t>
             </a:r>
           </a:p>
         </p:txBody>
@@ -10905,7 +10905,7 @@
                 </a:solidFill>
                 <a:latin typeface="Calibri"/>
               </a:rPr>
-              <a:t>BADM 225 · Chapter 1</a:t>
+              <a:t>BADM 225 · Chapter 1  ·  © Derek D. Bussan</a:t>
             </a:r>
           </a:p>
         </p:txBody>
@@ -11260,7 +11260,7 @@
                 </a:solidFill>
                 <a:latin typeface="Calibri"/>
               </a:rPr>
-              <a:t>BADM 225 · Chapter 1</a:t>
+              <a:t>BADM 225 · Chapter 1  ·  © Derek D. Bussan</a:t>
             </a:r>
           </a:p>
         </p:txBody>
@@ -11928,7 +11928,7 @@
                 </a:solidFill>
                 <a:latin typeface="Calibri"/>
               </a:rPr>
-              <a:t>BADM 225 · Chapter 1</a:t>
+              <a:t>BADM 225 · Chapter 1  ·  © Derek D. Bussan</a:t>
             </a:r>
           </a:p>
         </p:txBody>
@@ -12254,7 +12254,7 @@
                 </a:solidFill>
                 <a:latin typeface="Calibri"/>
               </a:rPr>
-              <a:t>BADM 225 · Chapter 1</a:t>
+              <a:t>BADM 225 · Chapter 1  ·  © Derek D. Bussan</a:t>
             </a:r>
           </a:p>
         </p:txBody>
@@ -12774,7 +12774,7 @@
                 </a:solidFill>
                 <a:latin typeface="Calibri"/>
               </a:rPr>
-              <a:t>BADM 225 · Chapter 1</a:t>
+              <a:t>BADM 225 · Chapter 1  ·  © Derek D. Bussan</a:t>
             </a:r>
           </a:p>
         </p:txBody>
@@ -12902,7 +12902,7 @@
                 </a:solidFill>
                 <a:latin typeface="Calibri"/>
               </a:rPr>
-              <a:t>BADM 225 · Chapter 1</a:t>
+              <a:t>BADM 225 · Chapter 1  ·  © Derek D. Bussan</a:t>
             </a:r>
           </a:p>
         </p:txBody>
@@ -13344,7 +13344,7 @@
                 </a:solidFill>
                 <a:latin typeface="Calibri"/>
               </a:rPr>
-              <a:t>BADM 225 · Chapter 1</a:t>
+              <a:t>BADM 225 · Chapter 1  ·  © Derek D. Bussan</a:t>
             </a:r>
           </a:p>
         </p:txBody>
@@ -13743,7 +13743,7 @@
                 </a:solidFill>
                 <a:latin typeface="Calibri"/>
               </a:rPr>
-              <a:t>BADM 225 · Chapter 1</a:t>
+              <a:t>BADM 225 · Chapter 1  ·  © Derek D. Bussan</a:t>
             </a:r>
           </a:p>
         </p:txBody>
@@ -13871,7 +13871,7 @@
                 </a:solidFill>
                 <a:latin typeface="Calibri"/>
               </a:rPr>
-              <a:t>BADM 225 · Chapter 1</a:t>
+              <a:t>BADM 225 · Chapter 1  ·  © Derek D. Bussan</a:t>
             </a:r>
           </a:p>
         </p:txBody>
@@ -14331,7 +14331,7 @@
                 </a:solidFill>
                 <a:latin typeface="Calibri"/>
               </a:rPr>
-              <a:t>BADM 225 · Chapter 1</a:t>
+              <a:t>BADM 225 · Chapter 1  ·  © Derek D. Bussan</a:t>
             </a:r>
           </a:p>
         </p:txBody>
@@ -14891,7 +14891,7 @@
                 </a:solidFill>
                 <a:latin typeface="Calibri"/>
               </a:rPr>
-              <a:t>BADM 225 · Chapter 1</a:t>
+              <a:t>BADM 225 · Chapter 1  ·  © Derek D. Bussan</a:t>
             </a:r>
           </a:p>
         </p:txBody>
@@ -15212,7 +15212,7 @@
                 </a:solidFill>
                 <a:latin typeface="Calibri"/>
               </a:rPr>
-              <a:t>BADM 225 · Chapter 1</a:t>
+              <a:t>BADM 225 · Chapter 1  ·  © Derek D. Bussan</a:t>
             </a:r>
           </a:p>
         </p:txBody>
@@ -15538,7 +15538,7 @@
                 </a:solidFill>
                 <a:latin typeface="Calibri"/>
               </a:rPr>
-              <a:t>BADM 225 · Chapter 1</a:t>
+              <a:t>BADM 225 · Chapter 1  ·  © Derek D. Bussan</a:t>
             </a:r>
           </a:p>
         </p:txBody>
@@ -15864,7 +15864,7 @@
                 </a:solidFill>
                 <a:latin typeface="Calibri"/>
               </a:rPr>
-              <a:t>BADM 225 · Chapter 1</a:t>
+              <a:t>BADM 225 · Chapter 1  ·  © Derek D. Bussan</a:t>
             </a:r>
           </a:p>
         </p:txBody>
@@ -16185,7 +16185,7 @@
                 </a:solidFill>
                 <a:latin typeface="Calibri"/>
               </a:rPr>
-              <a:t>BADM 225 · Chapter 1</a:t>
+              <a:t>BADM 225 · Chapter 1  ·  © Derek D. Bussan</a:t>
             </a:r>
           </a:p>
         </p:txBody>
@@ -16506,7 +16506,7 @@
                 </a:solidFill>
                 <a:latin typeface="Calibri"/>
               </a:rPr>
-              <a:t>BADM 225 · Chapter 1</a:t>
+              <a:t>BADM 225 · Chapter 1  ·  © Derek D. Bussan</a:t>
             </a:r>
           </a:p>
         </p:txBody>
@@ -17321,7 +17321,7 @@
                 </a:solidFill>
                 <a:latin typeface="Calibri"/>
               </a:rPr>
-              <a:t>BADM 225 · Chapter 1</a:t>
+              <a:t>BADM 225 · Chapter 1  ·  © Derek D. Bussan</a:t>
             </a:r>
           </a:p>
         </p:txBody>
@@ -17597,7 +17597,7 @@
                 </a:solidFill>
                 <a:latin typeface="Calibri"/>
               </a:rPr>
-              <a:t>BADM 225 · Chapter 1</a:t>
+              <a:t>BADM 225 · Chapter 1  ·  © Derek D. Bussan</a:t>
             </a:r>
           </a:p>
         </p:txBody>
@@ -17690,7 +17690,7 @@
                 </a:solidFill>
                 <a:latin typeface="Calibri"/>
               </a:rPr>
-              <a:t>BADM 225 · Chapter 1</a:t>
+              <a:t>BADM 225 · Chapter 1  ·  © Derek D. Bussan</a:t>
             </a:r>
           </a:p>
         </p:txBody>
@@ -18089,7 +18089,7 @@
                 </a:solidFill>
                 <a:latin typeface="Calibri"/>
               </a:rPr>
-              <a:t>BADM 225 · Chapter 1</a:t>
+              <a:t>BADM 225 · Chapter 1  ·  © Derek D. Bussan</a:t>
             </a:r>
           </a:p>
         </p:txBody>
@@ -18217,7 +18217,7 @@
                 </a:solidFill>
                 <a:latin typeface="Calibri"/>
               </a:rPr>
-              <a:t>BADM 225 · Chapter 1</a:t>
+              <a:t>BADM 225 · Chapter 1  ·  © Derek D. Bussan</a:t>
             </a:r>
           </a:p>
         </p:txBody>
@@ -18871,7 +18871,7 @@
                 </a:solidFill>
                 <a:latin typeface="Calibri"/>
               </a:rPr>
-              <a:t>BADM 225 · Chapter 1</a:t>
+              <a:t>BADM 225 · Chapter 1  ·  © Derek D. Bussan</a:t>
             </a:r>
           </a:p>
         </p:txBody>
@@ -19349,7 +19349,7 @@
                 </a:solidFill>
                 <a:latin typeface="Calibri"/>
               </a:rPr>
-              <a:t>BADM 225 · Chapter 1</a:t>
+              <a:t>BADM 225 · Chapter 1  ·  © Derek D. Bussan</a:t>
             </a:r>
           </a:p>
         </p:txBody>
@@ -19840,7 +19840,7 @@
                 </a:solidFill>
                 <a:latin typeface="Calibri"/>
               </a:rPr>
-              <a:t>BADM 225 · Chapter 1</a:t>
+              <a:t>BADM 225 · Chapter 1  ·  © Derek D. Bussan</a:t>
             </a:r>
           </a:p>
         </p:txBody>
@@ -20239,7 +20239,7 @@
                 </a:solidFill>
                 <a:latin typeface="Calibri"/>
               </a:rPr>
-              <a:t>BADM 225 · Chapter 1</a:t>
+              <a:t>BADM 225 · Chapter 1  ·  © Derek D. Bussan</a:t>
             </a:r>
           </a:p>
         </p:txBody>

--- a/slides/ch01-communicating-in-todays-workplace.pptx
+++ b/slides/ch01-communicating-in-todays-workplace.pptx
@@ -6146,7 +6146,7 @@
                 </a:solidFill>
                 <a:latin typeface="Calibri"/>
               </a:rPr>
-              <a:t>BADM 225 · Chapter 1  ·  Original instructional material — no publisher content</a:t>
+              <a:t>BADM 225 · Chapter 1  ·  Original material © 2026 Derek D. Bussan, PhD, MBA  ·  No publisher content</a:t>
             </a:r>
           </a:p>
         </p:txBody>
